--- a/03-Python程序设计-项目实战/V2授课PPT/W08-第15次课-用特征矩阵训练诊断大脑.pptx
+++ b/03-Python程序设计-项目实战/V2授课PPT/W08-第15次课-用特征矩阵训练诊断大脑.pptx
@@ -35,6 +35,9 @@
     <p:sldId id="309" r:id="rId61"/>
     <p:sldId id="311" r:id="rId63"/>
     <p:sldId id="312" r:id="rId64"/>
+    <p:sldId id="369" r:id="rId67"/>
+    <p:sldId id="370" r:id="rId66"/>
+    <p:sldId id="371" r:id="rId65"/>
     <p:sldId id="316" r:id="rId68"/>
     <p:sldId id="317" r:id="rId69"/>
     <p:sldId id="318" r:id="rId70"/>
@@ -8705,7 +8708,7 @@
                 </a:solidFill>
                 <a:latin typeface="微软雅黑"/>
               </a:rPr>
-              <a:t>10 / 61</a:t>
+              <a:t>10 / 64</a:t>
             </a:r>
           </a:p>
         </p:txBody>
@@ -9411,7 +9414,7 @@
                 </a:solidFill>
                 <a:latin typeface="微软雅黑"/>
               </a:rPr>
-              <a:t>11 / 61</a:t>
+              <a:t>11 / 64</a:t>
             </a:r>
           </a:p>
         </p:txBody>
@@ -10117,7 +10120,7 @@
                 </a:solidFill>
                 <a:latin typeface="微软雅黑"/>
               </a:rPr>
-              <a:t>12 / 61</a:t>
+              <a:t>12 / 64</a:t>
             </a:r>
           </a:p>
         </p:txBody>
@@ -10823,7 +10826,7 @@
                 </a:solidFill>
                 <a:latin typeface="微软雅黑"/>
               </a:rPr>
-              <a:t>13 / 61</a:t>
+              <a:t>13 / 64</a:t>
             </a:r>
           </a:p>
         </p:txBody>
@@ -11309,7 +11312,7 @@
                 </a:solidFill>
                 <a:latin typeface="微软雅黑"/>
               </a:rPr>
-              <a:t>14 / 61</a:t>
+              <a:t>14 / 64</a:t>
             </a:r>
           </a:p>
         </p:txBody>
@@ -12338,7 +12341,7 @@
                 </a:solidFill>
                 <a:latin typeface="微软雅黑"/>
               </a:rPr>
-              <a:t>15 / 61</a:t>
+              <a:t>15 / 64</a:t>
             </a:r>
           </a:p>
         </p:txBody>
@@ -13044,7 +13047,7 @@
                 </a:solidFill>
                 <a:latin typeface="微软雅黑"/>
               </a:rPr>
-              <a:t>16 / 61</a:t>
+              <a:t>16 / 64</a:t>
             </a:r>
           </a:p>
         </p:txBody>
@@ -13518,7 +13521,7 @@
                 </a:solidFill>
                 <a:latin typeface="微软雅黑"/>
               </a:rPr>
-              <a:t>17 / 61</a:t>
+              <a:t>17 / 64</a:t>
             </a:r>
           </a:p>
         </p:txBody>
@@ -14224,7 +14227,7 @@
                 </a:solidFill>
                 <a:latin typeface="微软雅黑"/>
               </a:rPr>
-              <a:t>18 / 61</a:t>
+              <a:t>18 / 64</a:t>
             </a:r>
           </a:p>
         </p:txBody>
@@ -15196,7 +15199,7 @@
                 </a:solidFill>
                 <a:latin typeface="微软雅黑"/>
               </a:rPr>
-              <a:t>19 / 61</a:t>
+              <a:t>19 / 64</a:t>
             </a:r>
           </a:p>
         </p:txBody>
@@ -16924,7 +16927,7 @@
                 </a:solidFill>
                 <a:latin typeface="微软雅黑"/>
               </a:rPr>
-              <a:t>2 / 61</a:t>
+              <a:t>2 / 64</a:t>
             </a:r>
           </a:p>
         </p:txBody>
@@ -17779,7 +17782,7 @@
                 </a:solidFill>
                 <a:latin typeface="微软雅黑"/>
               </a:rPr>
-              <a:t>20 / 61</a:t>
+              <a:t>20 / 64</a:t>
             </a:r>
           </a:p>
         </p:txBody>
@@ -18749,7 +18752,7 @@
                 </a:solidFill>
                 <a:latin typeface="微软雅黑"/>
               </a:rPr>
-              <a:t>21 / 61</a:t>
+              <a:t>21 / 64</a:t>
             </a:r>
           </a:p>
         </p:txBody>
@@ -19719,7 +19722,7 @@
                 </a:solidFill>
                 <a:latin typeface="微软雅黑"/>
               </a:rPr>
-              <a:t>22 / 61</a:t>
+              <a:t>22 / 64</a:t>
             </a:r>
           </a:p>
         </p:txBody>
@@ -20689,7 +20692,7 @@
                 </a:solidFill>
                 <a:latin typeface="微软雅黑"/>
               </a:rPr>
-              <a:t>23 / 61</a:t>
+              <a:t>23 / 64</a:t>
             </a:r>
           </a:p>
         </p:txBody>
@@ -21659,7 +21662,7 @@
                 </a:solidFill>
                 <a:latin typeface="微软雅黑"/>
               </a:rPr>
-              <a:t>24 / 61</a:t>
+              <a:t>24 / 64</a:t>
             </a:r>
           </a:p>
         </p:txBody>
@@ -22629,7 +22632,7 @@
                 </a:solidFill>
                 <a:latin typeface="微软雅黑"/>
               </a:rPr>
-              <a:t>25 / 61</a:t>
+              <a:t>25 / 64</a:t>
             </a:r>
           </a:p>
         </p:txBody>
@@ -23165,7 +23168,7 @@
                 </a:solidFill>
                 <a:latin typeface="微软雅黑"/>
               </a:rPr>
-              <a:t>26 / 61</a:t>
+              <a:t>26 / 64</a:t>
             </a:r>
           </a:p>
         </p:txBody>
@@ -24135,7 +24138,7 @@
                 </a:solidFill>
                 <a:latin typeface="微软雅黑"/>
               </a:rPr>
-              <a:t>27 / 61</a:t>
+              <a:t>27 / 64</a:t>
             </a:r>
           </a:p>
         </p:txBody>
@@ -25107,7 +25110,7 @@
                 </a:solidFill>
                 <a:latin typeface="微软雅黑"/>
               </a:rPr>
-              <a:t>28 / 61</a:t>
+              <a:t>28 / 64</a:t>
             </a:r>
           </a:p>
         </p:txBody>
@@ -25813,7 +25816,7 @@
                 </a:solidFill>
                 <a:latin typeface="微软雅黑"/>
               </a:rPr>
-              <a:t>29 / 61</a:t>
+              <a:t>29 / 64</a:t>
             </a:r>
           </a:p>
         </p:txBody>
@@ -26668,7 +26671,7 @@
                 </a:solidFill>
                 <a:latin typeface="微软雅黑"/>
               </a:rPr>
-              <a:t>3 / 61</a:t>
+              <a:t>3 / 64</a:t>
             </a:r>
           </a:p>
         </p:txBody>
@@ -27169,7 +27172,7 @@
                 </a:solidFill>
                 <a:latin typeface="微软雅黑"/>
               </a:rPr>
-              <a:t>30 / 61</a:t>
+              <a:t>30 / 64</a:t>
             </a:r>
           </a:p>
         </p:txBody>
@@ -28537,7 +28540,7 @@
                 </a:solidFill>
                 <a:latin typeface="微软雅黑"/>
               </a:rPr>
-              <a:t>31 / 61</a:t>
+              <a:t>34 / 64</a:t>
             </a:r>
           </a:p>
         </p:txBody>
@@ -29392,7 +29395,7 @@
                 </a:solidFill>
                 <a:latin typeface="微软雅黑"/>
               </a:rPr>
-              <a:t>32 / 61</a:t>
+              <a:t>35 / 64</a:t>
             </a:r>
           </a:p>
         </p:txBody>
@@ -30496,7 +30499,7 @@
                 </a:solidFill>
                 <a:latin typeface="微软雅黑"/>
               </a:rPr>
-              <a:t>33 / 61</a:t>
+              <a:t>36 / 64</a:t>
             </a:r>
           </a:p>
         </p:txBody>
@@ -31288,7 +31291,7 @@
                 </a:solidFill>
                 <a:latin typeface="微软雅黑"/>
               </a:rPr>
-              <a:t>34 / 61</a:t>
+              <a:t>37 / 64</a:t>
             </a:r>
           </a:p>
         </p:txBody>
@@ -31921,7 +31924,7 @@
                 </a:solidFill>
                 <a:latin typeface="微软雅黑"/>
               </a:rPr>
-              <a:t>35 / 61</a:t>
+              <a:t>38 / 64</a:t>
             </a:r>
           </a:p>
         </p:txBody>
@@ -32841,7 +32844,7 @@
                 </a:solidFill>
                 <a:latin typeface="微软雅黑"/>
               </a:rPr>
-              <a:t>36 / 61</a:t>
+              <a:t>39 / 64</a:t>
             </a:r>
           </a:p>
         </p:txBody>
@@ -33761,7 +33764,7 @@
                 </a:solidFill>
                 <a:latin typeface="微软雅黑"/>
               </a:rPr>
-              <a:t>37 / 61</a:t>
+              <a:t>40 / 64</a:t>
             </a:r>
           </a:p>
         </p:txBody>
@@ -34681,7 +34684,7 @@
                 </a:solidFill>
                 <a:latin typeface="微软雅黑"/>
               </a:rPr>
-              <a:t>38 / 61</a:t>
+              <a:t>41 / 64</a:t>
             </a:r>
           </a:p>
         </p:txBody>
@@ -35620,7 +35623,7 @@
                 </a:solidFill>
                 <a:latin typeface="微软雅黑"/>
               </a:rPr>
-              <a:t>39 / 61</a:t>
+              <a:t>42 / 64</a:t>
             </a:r>
           </a:p>
         </p:txBody>
@@ -36592,7 +36595,7 @@
                 </a:solidFill>
                 <a:latin typeface="微软雅黑"/>
               </a:rPr>
-              <a:t>4 / 61</a:t>
+              <a:t>4 / 64</a:t>
             </a:r>
           </a:p>
         </p:txBody>
@@ -37508,7 +37511,7 @@
                 </a:solidFill>
                 <a:latin typeface="微软雅黑"/>
               </a:rPr>
-              <a:t>40 / 61</a:t>
+              <a:t>43 / 64</a:t>
             </a:r>
           </a:p>
         </p:txBody>
@@ -38432,7 +38435,7 @@
                 </a:solidFill>
                 <a:latin typeface="微软雅黑"/>
               </a:rPr>
-              <a:t>41 / 61</a:t>
+              <a:t>44 / 64</a:t>
             </a:r>
           </a:p>
         </p:txBody>
@@ -39224,7 +39227,7 @@
                 </a:solidFill>
                 <a:latin typeface="微软雅黑"/>
               </a:rPr>
-              <a:t>42 / 61</a:t>
+              <a:t>45 / 64</a:t>
             </a:r>
           </a:p>
         </p:txBody>
@@ -40016,7 +40019,7 @@
                 </a:solidFill>
                 <a:latin typeface="微软雅黑"/>
               </a:rPr>
-              <a:t>43 / 61</a:t>
+              <a:t>46 / 64</a:t>
             </a:r>
           </a:p>
         </p:txBody>
@@ -42067,7 +42070,7 @@
                 </a:solidFill>
                 <a:latin typeface="微软雅黑"/>
               </a:rPr>
-              <a:t>45 / 61</a:t>
+              <a:t>48 / 64</a:t>
             </a:r>
           </a:p>
         </p:txBody>
@@ -42775,7 +42778,7 @@
                 </a:solidFill>
                 <a:latin typeface="微软雅黑"/>
               </a:rPr>
-              <a:t>46 / 61</a:t>
+              <a:t>49 / 64</a:t>
             </a:r>
           </a:p>
         </p:txBody>
@@ -43415,7 +43418,7 @@
                 </a:solidFill>
                 <a:latin typeface="微软雅黑"/>
               </a:rPr>
-              <a:t>47 / 61</a:t>
+              <a:t>50 / 64</a:t>
             </a:r>
           </a:p>
         </p:txBody>
@@ -44000,7 +44003,7 @@
                 </a:solidFill>
                 <a:latin typeface="微软雅黑"/>
               </a:rPr>
-              <a:t>48 / 61</a:t>
+              <a:t>51 / 64</a:t>
             </a:r>
           </a:p>
         </p:txBody>
@@ -44792,7 +44795,7 @@
                 </a:solidFill>
                 <a:latin typeface="微软雅黑"/>
               </a:rPr>
-              <a:t>49 / 61</a:t>
+              <a:t>52 / 64</a:t>
             </a:r>
           </a:p>
         </p:txBody>
@@ -46260,7 +46263,7 @@
                 </a:solidFill>
                 <a:latin typeface="微软雅黑"/>
               </a:rPr>
-              <a:t>5 / 61</a:t>
+              <a:t>5 / 64</a:t>
             </a:r>
           </a:p>
         </p:txBody>
@@ -47892,7 +47895,7 @@
                 </a:solidFill>
                 <a:latin typeface="微软雅黑"/>
               </a:rPr>
-              <a:t>50 / 61</a:t>
+              <a:t>53 / 64</a:t>
             </a:r>
           </a:p>
         </p:txBody>
@@ -48690,7 +48693,7 @@
                 </a:solidFill>
                 <a:latin typeface="微软雅黑"/>
               </a:rPr>
-              <a:t>51 / 61</a:t>
+              <a:t>54 / 64</a:t>
             </a:r>
           </a:p>
         </p:txBody>
@@ -49836,7 +49839,7 @@
                 </a:solidFill>
                 <a:latin typeface="微软雅黑"/>
               </a:rPr>
-              <a:t>52 / 61</a:t>
+              <a:t>55 / 64</a:t>
             </a:r>
           </a:p>
         </p:txBody>
@@ -50689,7 +50692,7 @@
                 </a:solidFill>
                 <a:latin typeface="微软雅黑"/>
               </a:rPr>
-              <a:t>53 / 61</a:t>
+              <a:t>56 / 64</a:t>
             </a:r>
           </a:p>
         </p:txBody>
@@ -51661,7 +51664,7 @@
                 </a:solidFill>
                 <a:latin typeface="微软雅黑"/>
               </a:rPr>
-              <a:t>54 / 61</a:t>
+              <a:t>57 / 64</a:t>
             </a:r>
           </a:p>
         </p:txBody>
@@ -52633,7 +52636,7 @@
                 </a:solidFill>
                 <a:latin typeface="微软雅黑"/>
               </a:rPr>
-              <a:t>55 / 61</a:t>
+              <a:t>58 / 64</a:t>
             </a:r>
           </a:p>
         </p:txBody>
@@ -53892,7 +53895,7 @@
                 </a:solidFill>
                 <a:latin typeface="微软雅黑"/>
               </a:rPr>
-              <a:t>56 / 61</a:t>
+              <a:t>59 / 64</a:t>
             </a:r>
           </a:p>
         </p:txBody>
@@ -54864,7 +54867,7 @@
                 </a:solidFill>
                 <a:latin typeface="微软雅黑"/>
               </a:rPr>
-              <a:t>57 / 61</a:t>
+              <a:t>60 / 64</a:t>
             </a:r>
           </a:p>
         </p:txBody>
@@ -55836,7 +55839,7 @@
                 </a:solidFill>
                 <a:latin typeface="微软雅黑"/>
               </a:rPr>
-              <a:t>58 / 61</a:t>
+              <a:t>61 / 64</a:t>
             </a:r>
           </a:p>
         </p:txBody>
@@ -56628,7 +56631,7 @@
                 </a:solidFill>
                 <a:latin typeface="微软雅黑"/>
               </a:rPr>
-              <a:t>59 / 61</a:t>
+              <a:t>62 / 64</a:t>
             </a:r>
           </a:p>
         </p:txBody>
@@ -57334,7 +57337,7 @@
                 </a:solidFill>
                 <a:latin typeface="微软雅黑"/>
               </a:rPr>
-              <a:t>6 / 61</a:t>
+              <a:t>6 / 64</a:t>
             </a:r>
           </a:p>
         </p:txBody>
@@ -57694,7 +57697,7 @@
                 </a:solidFill>
                 <a:latin typeface="微软雅黑"/>
               </a:rPr>
-              <a:t>60 / 61</a:t>
+              <a:t>63 / 64</a:t>
             </a:r>
           </a:p>
         </p:txBody>
@@ -58065,6 +58068,2860 @@
 </p:sld>
 </file>
 
+<file path=ppt/slides/slide62.xml><?xml version="1.0" encoding="utf-8"?>
+<p:sld xmlns:a="http://schemas.openxmlformats.org/drawingml/2006/main" xmlns:p="http://schemas.openxmlformats.org/presentationml/2006/main" xmlns:r="http://schemas.openxmlformats.org/officeDocument/2006/relationships">
+  <p:cSld>
+    <p:spTree>
+      <p:nvGrpSpPr>
+        <p:cNvPr id="1" name=""/>
+        <p:cNvGrpSpPr/>
+        <p:nvPr/>
+      </p:nvGrpSpPr>
+      <p:grpSpPr/>
+      <p:sp>
+        <p:nvSpPr>
+          <p:cNvPr id="2" name="Rectangle 1"/>
+          <p:cNvSpPr/>
+          <p:nvPr/>
+        </p:nvSpPr>
+        <p:spPr>
+          <a:xfrm>
+            <a:off x="0" y="0"/>
+            <a:ext cx="12192000" cy="1150000"/>
+          </a:xfrm>
+          <a:prstGeom prst="rect">
+            <a:avLst/>
+          </a:prstGeom>
+          <a:solidFill>
+            <a:srgbClr val="010328"/>
+          </a:solidFill>
+          <a:ln>
+            <a:noFill/>
+          </a:ln>
+          <a:effectLst/>
+        </p:spPr>
+        <p:style>
+          <a:lnRef idx="1">
+            <a:schemeClr val="accent1"/>
+          </a:lnRef>
+          <a:fillRef idx="3">
+            <a:schemeClr val="accent1"/>
+          </a:fillRef>
+          <a:effectRef idx="2">
+            <a:schemeClr val="accent1"/>
+          </a:effectRef>
+          <a:fontRef idx="minor">
+            <a:schemeClr val="lt1"/>
+          </a:fontRef>
+        </p:style>
+        <p:txBody>
+          <a:bodyPr rtlCol="0" anchor="ctr"/>
+          <a:lstStyle/>
+          <a:p>
+            <a:pPr algn="ctr"/>
+          </a:p>
+        </p:txBody>
+      </p:sp>
+      <p:sp>
+        <p:nvSpPr>
+          <p:cNvPr id="3" name="Rectangle 2"/>
+          <p:cNvSpPr/>
+          <p:nvPr/>
+        </p:nvSpPr>
+        <p:spPr>
+          <a:xfrm>
+            <a:off x="0" y="1150000"/>
+            <a:ext cx="2600000" cy="70000"/>
+          </a:xfrm>
+          <a:prstGeom prst="rect">
+            <a:avLst/>
+          </a:prstGeom>
+          <a:solidFill>
+            <a:srgbClr val="F5670F"/>
+          </a:solidFill>
+          <a:ln>
+            <a:noFill/>
+          </a:ln>
+          <a:effectLst/>
+        </p:spPr>
+        <p:style>
+          <a:lnRef idx="1">
+            <a:schemeClr val="accent1"/>
+          </a:lnRef>
+          <a:fillRef idx="3">
+            <a:schemeClr val="accent1"/>
+          </a:fillRef>
+          <a:effectRef idx="2">
+            <a:schemeClr val="accent1"/>
+          </a:effectRef>
+          <a:fontRef idx="minor">
+            <a:schemeClr val="lt1"/>
+          </a:fontRef>
+        </p:style>
+        <p:txBody>
+          <a:bodyPr rtlCol="0" anchor="ctr"/>
+          <a:lstStyle/>
+          <a:p>
+            <a:pPr algn="ctr"/>
+          </a:p>
+        </p:txBody>
+      </p:sp>
+      <p:sp>
+        <p:nvSpPr>
+          <p:cNvPr id="4" name="TextBox 3"/>
+          <p:cNvSpPr txBox="1"/>
+          <p:nvPr/>
+        </p:nvSpPr>
+        <p:spPr>
+          <a:xfrm>
+            <a:off x="700000" y="300000"/>
+            <a:ext cx="10792000" cy="700000"/>
+          </a:xfrm>
+          <a:prstGeom prst="rect">
+            <a:avLst/>
+          </a:prstGeom>
+          <a:noFill/>
+        </p:spPr>
+        <p:txBody>
+          <a:bodyPr wrap="square" anchor="t">
+            <a:spAutoFit/>
+          </a:bodyPr>
+          <a:lstStyle/>
+          <a:p>
+            <a:pPr algn="l">
+              <a:lnSpc>
+                <a:spcPct val="110000"/>
+              </a:lnSpc>
+              <a:spcAft>
+                <a:spcPts val="600"/>
+              </a:spcAft>
+            </a:pPr>
+            <a:r>
+              <a:rPr sz="2400" b="1">
+                <a:solidFill>
+                  <a:srgbClr val="FFFFFF"/>
+                </a:solidFill>
+                <a:latin typeface="微软雅黑"/>
+              </a:rPr>
+              <a:t>工程化代码：训练·评估门禁·推理抽成纯函数</a:t>
+            </a:r>
+            <a:endParaRPr sz="2400" b="1">
+              <a:solidFill>
+                <a:srgbClr val="FFFFFF"/>
+              </a:solidFill>
+              <a:latin typeface="微软雅黑" panose="020B0502040204020203" charset="-122"/>
+            </a:endParaRPr>
+          </a:p>
+        </p:txBody>
+      </p:sp>
+      <p:sp>
+        <p:nvSpPr>
+          <p:cNvPr id="5" name="Rectangle 4"/>
+          <p:cNvSpPr/>
+          <p:nvPr/>
+        </p:nvSpPr>
+        <p:spPr>
+          <a:xfrm>
+            <a:off x="760000" y="1750000"/>
+            <a:ext cx="10900000" cy="4600000"/>
+          </a:xfrm>
+          <a:prstGeom prst="rect">
+            <a:avLst/>
+          </a:prstGeom>
+          <a:solidFill>
+            <a:srgbClr val="0D112A"/>
+          </a:solidFill>
+          <a:ln>
+            <a:noFill/>
+          </a:ln>
+          <a:effectLst/>
+        </p:spPr>
+        <p:style>
+          <a:lnRef idx="1">
+            <a:schemeClr val="accent1"/>
+          </a:lnRef>
+          <a:fillRef idx="3">
+            <a:schemeClr val="accent1"/>
+          </a:fillRef>
+          <a:effectRef idx="2">
+            <a:schemeClr val="accent1"/>
+          </a:effectRef>
+          <a:fontRef idx="minor">
+            <a:schemeClr val="lt1"/>
+          </a:fontRef>
+        </p:style>
+        <p:txBody>
+          <a:bodyPr rtlCol="0" anchor="ctr"/>
+          <a:lstStyle/>
+          <a:p>
+            <a:pPr algn="ctr"/>
+          </a:p>
+        </p:txBody>
+      </p:sp>
+      <p:sp>
+        <p:nvSpPr>
+          <p:cNvPr id="6" name="Rectangle 5"/>
+          <p:cNvSpPr/>
+          <p:nvPr/>
+        </p:nvSpPr>
+        <p:spPr>
+          <a:xfrm>
+            <a:off x="760000" y="1750000"/>
+            <a:ext cx="10900000" cy="120000"/>
+          </a:xfrm>
+          <a:prstGeom prst="rect">
+            <a:avLst/>
+          </a:prstGeom>
+          <a:solidFill>
+            <a:srgbClr val="F5670F"/>
+          </a:solidFill>
+          <a:ln>
+            <a:noFill/>
+          </a:ln>
+          <a:effectLst/>
+        </p:spPr>
+        <p:style>
+          <a:lnRef idx="1">
+            <a:schemeClr val="accent1"/>
+          </a:lnRef>
+          <a:fillRef idx="3">
+            <a:schemeClr val="accent1"/>
+          </a:fillRef>
+          <a:effectRef idx="2">
+            <a:schemeClr val="accent1"/>
+          </a:effectRef>
+          <a:fontRef idx="minor">
+            <a:schemeClr val="lt1"/>
+          </a:fontRef>
+        </p:style>
+        <p:txBody>
+          <a:bodyPr rtlCol="0" anchor="ctr"/>
+          <a:lstStyle/>
+          <a:p>
+            <a:pPr algn="ctr"/>
+          </a:p>
+        </p:txBody>
+      </p:sp>
+      <p:sp>
+        <p:nvSpPr>
+          <p:cNvPr id="7" name="TextBox 6"/>
+          <p:cNvSpPr txBox="1"/>
+          <p:nvPr/>
+        </p:nvSpPr>
+        <p:spPr>
+          <a:xfrm>
+            <a:off x="1000000" y="2000000"/>
+            <a:ext cx="10300000" cy="4200000"/>
+          </a:xfrm>
+          <a:prstGeom prst="rect">
+            <a:avLst/>
+          </a:prstGeom>
+          <a:noFill/>
+        </p:spPr>
+        <p:txBody>
+          <a:bodyPr wrap="square" anchor="t">
+            <a:spAutoFit/>
+          </a:bodyPr>
+          <a:lstStyle/>
+          <a:p>
+            <a:pPr algn="l">
+              <a:lnSpc>
+                <a:spcPct val="112000"/>
+              </a:lnSpc>
+              <a:spcAft>
+                <a:spcPts val="0"/>
+              </a:spcAft>
+            </a:pPr>
+            <a:r>
+              <a:rPr sz="1250" b="0">
+                <a:solidFill>
+                  <a:srgbClr val="D6DEF6"/>
+                </a:solidFill>
+                <a:latin typeface="微软雅黑"/>
+              </a:rPr>
+              <a:t># core.py —— 训练 / 评估门禁 / 保存载入（joblib）</a:t>
+            </a:r>
+            <a:endParaRPr sz="1250" b="0">
+              <a:solidFill>
+                <a:srgbClr val="D6DEF6"/>
+              </a:solidFill>
+              <a:latin typeface="微软雅黑" panose="020B0502040204020203" charset="-122"/>
+            </a:endParaRPr>
+          </a:p>
+          <a:p>
+            <a:r>
+              <a:rPr sz="1250" b="0">
+                <a:solidFill>
+                  <a:srgbClr val="D6DEF6"/>
+                </a:solidFill>
+                <a:latin typeface="微软雅黑"/>
+              </a:rPr>
+              <a:t/>
+            </a:r>
+          </a:p>
+          <a:p>
+            <a:r>
+              <a:rPr sz="1250" b="0">
+                <a:solidFill>
+                  <a:srgbClr val="D6DEF6"/>
+                </a:solidFill>
+                <a:latin typeface="微软雅黑"/>
+              </a:rPr>
+              <a:t>def train(X, y, test_size=0.25, seed=42):</a:t>
+            </a:r>
+          </a:p>
+          <a:p>
+            <a:r>
+              <a:rPr sz="1250" b="0">
+                <a:solidFill>
+                  <a:srgbClr val="D6DEF6"/>
+                </a:solidFill>
+                <a:latin typeface="微软雅黑"/>
+              </a:rPr>
+              <a:t>    Xtr, Xte, ytr, yte = train_test_split(</a:t>
+            </a:r>
+          </a:p>
+          <a:p>
+            <a:r>
+              <a:rPr sz="1250" b="0">
+                <a:solidFill>
+                  <a:srgbClr val="D6DEF6"/>
+                </a:solidFill>
+                <a:latin typeface="微软雅黑"/>
+              </a:rPr>
+              <a:t>        X, y, test_size=test_size,</a:t>
+            </a:r>
+          </a:p>
+          <a:p>
+            <a:r>
+              <a:rPr sz="1250" b="0">
+                <a:solidFill>
+                  <a:srgbClr val="D6DEF6"/>
+                </a:solidFill>
+                <a:latin typeface="微软雅黑"/>
+              </a:rPr>
+              <a:t>        stratify=y, random_state=seed)</a:t>
+            </a:r>
+          </a:p>
+          <a:p>
+            <a:r>
+              <a:rPr sz="1250" b="0">
+                <a:solidFill>
+                  <a:srgbClr val="D6DEF6"/>
+                </a:solidFill>
+                <a:latin typeface="微软雅黑"/>
+              </a:rPr>
+              <a:t>    m = RandomForestClassifier(</a:t>
+            </a:r>
+          </a:p>
+          <a:p>
+            <a:r>
+              <a:rPr sz="1250" b="0">
+                <a:solidFill>
+                  <a:srgbClr val="D6DEF6"/>
+                </a:solidFill>
+                <a:latin typeface="微软雅黑"/>
+              </a:rPr>
+              <a:t>        n_estimators=100, random_state=0).fit(Xtr, ytr)</a:t>
+            </a:r>
+          </a:p>
+          <a:p>
+            <a:r>
+              <a:rPr sz="1250" b="0">
+                <a:solidFill>
+                  <a:srgbClr val="D6DEF6"/>
+                </a:solidFill>
+                <a:latin typeface="微软雅黑"/>
+              </a:rPr>
+              <a:t>    return m, {"macro_f1": f1_score(yte, m.predict(Xte),</a:t>
+            </a:r>
+          </a:p>
+          <a:p>
+            <a:r>
+              <a:rPr sz="1250" b="0">
+                <a:solidFill>
+                  <a:srgbClr val="D6DEF6"/>
+                </a:solidFill>
+                <a:latin typeface="微软雅黑"/>
+              </a:rPr>
+              <a:t>                        average="macro")}</a:t>
+            </a:r>
+          </a:p>
+          <a:p>
+            <a:r>
+              <a:rPr sz="1250" b="0">
+                <a:solidFill>
+                  <a:srgbClr val="D6DEF6"/>
+                </a:solidFill>
+                <a:latin typeface="微软雅黑"/>
+              </a:rPr>
+              <a:t/>
+            </a:r>
+          </a:p>
+          <a:p>
+            <a:r>
+              <a:rPr sz="1250" b="0">
+                <a:solidFill>
+                  <a:srgbClr val="D6DEF6"/>
+                </a:solidFill>
+                <a:latin typeface="微软雅黑"/>
+              </a:rPr>
+              <a:t>def gate(metrics, min_f1=0.80):</a:t>
+            </a:r>
+          </a:p>
+          <a:p>
+            <a:r>
+              <a:rPr sz="1250" b="0">
+                <a:solidFill>
+                  <a:srgbClr val="D6DEF6"/>
+                </a:solidFill>
+                <a:latin typeface="微软雅黑"/>
+              </a:rPr>
+              <a:t>    """评估门禁：macro-F1 低于阈值即不通过"""</a:t>
+            </a:r>
+          </a:p>
+          <a:p>
+            <a:r>
+              <a:rPr sz="1250" b="0">
+                <a:solidFill>
+                  <a:srgbClr val="D6DEF6"/>
+                </a:solidFill>
+                <a:latin typeface="微软雅黑"/>
+              </a:rPr>
+              <a:t>    return metrics["macro_f1"] &gt;= min_f1</a:t>
+            </a:r>
+          </a:p>
+          <a:p>
+            <a:r>
+              <a:rPr sz="1250" b="0">
+                <a:solidFill>
+                  <a:srgbClr val="D6DEF6"/>
+                </a:solidFill>
+                <a:latin typeface="微软雅黑"/>
+              </a:rPr>
+              <a:t/>
+            </a:r>
+          </a:p>
+          <a:p>
+            <a:r>
+              <a:rPr sz="1250" b="0">
+                <a:solidFill>
+                  <a:srgbClr val="D6DEF6"/>
+                </a:solidFill>
+                <a:latin typeface="微软雅黑"/>
+              </a:rPr>
+              <a:t>def save_model(model, path, metrics):</a:t>
+            </a:r>
+          </a:p>
+          <a:p>
+            <a:r>
+              <a:rPr sz="1250" b="0">
+                <a:solidFill>
+                  <a:srgbClr val="D6DEF6"/>
+                </a:solidFill>
+                <a:latin typeface="微软雅黑"/>
+              </a:rPr>
+              <a:t>    os.makedirs(os.path.dirname(os.path.abspath(path)),</a:t>
+            </a:r>
+          </a:p>
+          <a:p>
+            <a:r>
+              <a:rPr sz="1250" b="0">
+                <a:solidFill>
+                  <a:srgbClr val="D6DEF6"/>
+                </a:solidFill>
+                <a:latin typeface="微软雅黑"/>
+              </a:rPr>
+              <a:t>                exist_ok=True)</a:t>
+            </a:r>
+          </a:p>
+          <a:p>
+            <a:r>
+              <a:rPr sz="1250" b="0">
+                <a:solidFill>
+                  <a:srgbClr val="D6DEF6"/>
+                </a:solidFill>
+                <a:latin typeface="微软雅黑"/>
+              </a:rPr>
+              <a:t>    joblib.dump(model, path); return path</a:t>
+            </a:r>
+          </a:p>
+        </p:txBody>
+      </p:sp>
+      <p:sp>
+        <p:nvSpPr>
+          <p:cNvPr id="8" name="Rectangle 7"/>
+          <p:cNvSpPr/>
+          <p:nvPr/>
+        </p:nvSpPr>
+        <p:spPr>
+          <a:xfrm>
+            <a:off x="500000" y="6500000"/>
+            <a:ext cx="11100000" cy="20000"/>
+          </a:xfrm>
+          <a:prstGeom prst="rect">
+            <a:avLst/>
+          </a:prstGeom>
+          <a:solidFill>
+            <a:srgbClr val="C9D4EE"/>
+          </a:solidFill>
+          <a:ln>
+            <a:noFill/>
+          </a:ln>
+          <a:effectLst/>
+        </p:spPr>
+        <p:style>
+          <a:lnRef idx="1">
+            <a:schemeClr val="accent1"/>
+          </a:lnRef>
+          <a:fillRef idx="3">
+            <a:schemeClr val="accent1"/>
+          </a:fillRef>
+          <a:effectRef idx="2">
+            <a:schemeClr val="accent1"/>
+          </a:effectRef>
+          <a:fontRef idx="minor">
+            <a:schemeClr val="lt1"/>
+          </a:fontRef>
+        </p:style>
+        <p:txBody>
+          <a:bodyPr rtlCol="0" anchor="ctr"/>
+          <a:lstStyle/>
+          <a:p>
+            <a:pPr algn="ctr"/>
+          </a:p>
+        </p:txBody>
+      </p:sp>
+      <p:sp>
+        <p:nvSpPr>
+          <p:cNvPr id="9" name="TextBox 8"/>
+          <p:cNvSpPr txBox="1"/>
+          <p:nvPr/>
+        </p:nvSpPr>
+        <p:spPr>
+          <a:xfrm>
+            <a:off x="500000" y="6540000"/>
+            <a:ext cx="7000000" cy="300000"/>
+          </a:xfrm>
+          <a:prstGeom prst="rect">
+            <a:avLst/>
+          </a:prstGeom>
+          <a:noFill/>
+        </p:spPr>
+        <p:txBody>
+          <a:bodyPr wrap="square" anchor="t">
+            <a:spAutoFit/>
+          </a:bodyPr>
+          <a:lstStyle/>
+          <a:p>
+            <a:pPr algn="l">
+              <a:lnSpc>
+                <a:spcPct val="110000"/>
+              </a:lnSpc>
+              <a:spcAft>
+                <a:spcPts val="600"/>
+              </a:spcAft>
+            </a:pPr>
+            <a:r>
+              <a:rPr sz="1000" b="0">
+                <a:solidFill>
+                  <a:srgbClr val="8A97B5"/>
+                </a:solidFill>
+                <a:latin typeface="微软雅黑" panose="020B0502040204020203" charset="-122"/>
+              </a:rPr>
+              <a:t>两江智造集团 · Python程序设计（项目实战）</a:t>
+            </a:r>
+            <a:endParaRPr sz="1000" b="0">
+              <a:solidFill>
+                <a:srgbClr val="8A97B5"/>
+              </a:solidFill>
+              <a:latin typeface="微软雅黑" panose="020B0502040204020203" charset="-122"/>
+            </a:endParaRPr>
+          </a:p>
+        </p:txBody>
+      </p:sp>
+      <p:sp>
+        <p:nvSpPr>
+          <p:cNvPr id="10" name="TextBox 9"/>
+          <p:cNvSpPr txBox="1"/>
+          <p:nvPr/>
+        </p:nvSpPr>
+        <p:spPr>
+          <a:xfrm>
+            <a:off x="10600000" y="6540000"/>
+            <a:ext cx="1000000" cy="300000"/>
+          </a:xfrm>
+          <a:prstGeom prst="rect">
+            <a:avLst/>
+          </a:prstGeom>
+          <a:noFill/>
+        </p:spPr>
+        <p:txBody>
+          <a:bodyPr wrap="square" anchor="t">
+            <a:spAutoFit/>
+          </a:bodyPr>
+          <a:lstStyle/>
+          <a:p>
+            <a:pPr algn="r">
+              <a:lnSpc>
+                <a:spcPct val="110000"/>
+              </a:lnSpc>
+              <a:spcAft>
+                <a:spcPts val="600"/>
+              </a:spcAft>
+            </a:pPr>
+            <a:r>
+              <a:rPr sz="1000" b="0">
+                <a:solidFill>
+                  <a:srgbClr val="8A97B5"/>
+                </a:solidFill>
+                <a:latin typeface="微软雅黑"/>
+              </a:rPr>
+              <a:t>31 / 64</a:t>
+            </a:r>
+            <a:endParaRPr sz="1000" b="0">
+              <a:solidFill>
+                <a:srgbClr val="8A97B5"/>
+              </a:solidFill>
+              <a:latin typeface="微软雅黑" panose="020B0502040204020203" charset="-122"/>
+            </a:endParaRPr>
+          </a:p>
+        </p:txBody>
+      </p:sp>
+    </p:spTree>
+  </p:cSld>
+  <p:clrMapOvr>
+    <a:masterClrMapping/>
+  </p:clrMapOvr>
+</p:sld>
+</file>
+
+<file path=ppt/slides/slide63.xml><?xml version="1.0" encoding="utf-8"?>
+<p:sld xmlns:a="http://schemas.openxmlformats.org/drawingml/2006/main" xmlns:p="http://schemas.openxmlformats.org/presentationml/2006/main" xmlns:r="http://schemas.openxmlformats.org/officeDocument/2006/relationships">
+  <p:cSld>
+    <p:spTree>
+      <p:nvGrpSpPr>
+        <p:cNvPr id="1" name=""/>
+        <p:cNvGrpSpPr/>
+        <p:nvPr/>
+      </p:nvGrpSpPr>
+      <p:grpSpPr/>
+      <p:sp>
+        <p:nvSpPr>
+          <p:cNvPr id="2" name="Rectangle 1"/>
+          <p:cNvSpPr/>
+          <p:nvPr/>
+        </p:nvSpPr>
+        <p:spPr>
+          <a:xfrm>
+            <a:off x="0" y="0"/>
+            <a:ext cx="12192000" cy="1150000"/>
+          </a:xfrm>
+          <a:prstGeom prst="rect">
+            <a:avLst/>
+          </a:prstGeom>
+          <a:solidFill>
+            <a:srgbClr val="010328"/>
+          </a:solidFill>
+          <a:ln>
+            <a:noFill/>
+          </a:ln>
+          <a:effectLst/>
+        </p:spPr>
+        <p:style>
+          <a:lnRef idx="1">
+            <a:schemeClr val="accent1"/>
+          </a:lnRef>
+          <a:fillRef idx="3">
+            <a:schemeClr val="accent1"/>
+          </a:fillRef>
+          <a:effectRef idx="2">
+            <a:schemeClr val="accent1"/>
+          </a:effectRef>
+          <a:fontRef idx="minor">
+            <a:schemeClr val="lt1"/>
+          </a:fontRef>
+        </p:style>
+        <p:txBody>
+          <a:bodyPr rtlCol="0" anchor="ctr"/>
+          <a:lstStyle/>
+          <a:p>
+            <a:pPr algn="ctr"/>
+          </a:p>
+        </p:txBody>
+      </p:sp>
+      <p:sp>
+        <p:nvSpPr>
+          <p:cNvPr id="3" name="Rectangle 2"/>
+          <p:cNvSpPr/>
+          <p:nvPr/>
+        </p:nvSpPr>
+        <p:spPr>
+          <a:xfrm>
+            <a:off x="0" y="1150000"/>
+            <a:ext cx="2600000" cy="70000"/>
+          </a:xfrm>
+          <a:prstGeom prst="rect">
+            <a:avLst/>
+          </a:prstGeom>
+          <a:solidFill>
+            <a:srgbClr val="F5670F"/>
+          </a:solidFill>
+          <a:ln>
+            <a:noFill/>
+          </a:ln>
+          <a:effectLst/>
+        </p:spPr>
+        <p:style>
+          <a:lnRef idx="1">
+            <a:schemeClr val="accent1"/>
+          </a:lnRef>
+          <a:fillRef idx="3">
+            <a:schemeClr val="accent1"/>
+          </a:fillRef>
+          <a:effectRef idx="2">
+            <a:schemeClr val="accent1"/>
+          </a:effectRef>
+          <a:fontRef idx="minor">
+            <a:schemeClr val="lt1"/>
+          </a:fontRef>
+        </p:style>
+        <p:txBody>
+          <a:bodyPr rtlCol="0" anchor="ctr"/>
+          <a:lstStyle/>
+          <a:p>
+            <a:pPr algn="ctr"/>
+          </a:p>
+        </p:txBody>
+      </p:sp>
+      <p:sp>
+        <p:nvSpPr>
+          <p:cNvPr id="4" name="TextBox 3"/>
+          <p:cNvSpPr txBox="1"/>
+          <p:nvPr/>
+        </p:nvSpPr>
+        <p:spPr>
+          <a:xfrm>
+            <a:off x="700000" y="300000"/>
+            <a:ext cx="10792000" cy="700000"/>
+          </a:xfrm>
+          <a:prstGeom prst="rect">
+            <a:avLst/>
+          </a:prstGeom>
+          <a:noFill/>
+        </p:spPr>
+        <p:txBody>
+          <a:bodyPr wrap="square" anchor="t">
+            <a:spAutoFit/>
+          </a:bodyPr>
+          <a:lstStyle/>
+          <a:p>
+            <a:pPr algn="l">
+              <a:lnSpc>
+                <a:spcPct val="110000"/>
+              </a:lnSpc>
+              <a:spcAft>
+                <a:spcPts val="600"/>
+              </a:spcAft>
+            </a:pPr>
+            <a:r>
+              <a:rPr sz="2400" b="1">
+                <a:solidFill>
+                  <a:srgbClr val="FFFFFF"/>
+                </a:solidFill>
+                <a:latin typeface="微软雅黑"/>
+              </a:rPr>
+              <a:t>工程化设计：规则外置 —— 改配置不改代码</a:t>
+            </a:r>
+            <a:endParaRPr sz="2400" b="1">
+              <a:solidFill>
+                <a:srgbClr val="FFFFFF"/>
+              </a:solidFill>
+              <a:latin typeface="微软雅黑" panose="020B0502040204020203" charset="-122"/>
+            </a:endParaRPr>
+          </a:p>
+        </p:txBody>
+      </p:sp>
+      <p:sp>
+        <p:nvSpPr>
+          <p:cNvPr id="5" name="Rectangle 4"/>
+          <p:cNvSpPr/>
+          <p:nvPr/>
+        </p:nvSpPr>
+        <p:spPr>
+          <a:xfrm>
+            <a:off x="760000" y="1750000"/>
+            <a:ext cx="10900000" cy="700000"/>
+          </a:xfrm>
+          <a:prstGeom prst="rect">
+            <a:avLst/>
+          </a:prstGeom>
+          <a:solidFill>
+            <a:srgbClr val="010328"/>
+          </a:solidFill>
+          <a:ln>
+            <a:noFill/>
+          </a:ln>
+          <a:effectLst/>
+        </p:spPr>
+        <p:style>
+          <a:lnRef idx="1">
+            <a:schemeClr val="accent1"/>
+          </a:lnRef>
+          <a:fillRef idx="3">
+            <a:schemeClr val="accent1"/>
+          </a:fillRef>
+          <a:effectRef idx="2">
+            <a:schemeClr val="accent1"/>
+          </a:effectRef>
+          <a:fontRef idx="minor">
+            <a:schemeClr val="lt1"/>
+          </a:fontRef>
+        </p:style>
+        <p:txBody>
+          <a:bodyPr rtlCol="0" anchor="ctr"/>
+          <a:lstStyle/>
+          <a:p>
+            <a:pPr algn="ctr"/>
+          </a:p>
+        </p:txBody>
+      </p:sp>
+      <p:sp>
+        <p:nvSpPr>
+          <p:cNvPr id="6" name="TextBox 5"/>
+          <p:cNvSpPr txBox="1"/>
+          <p:nvPr/>
+        </p:nvSpPr>
+        <p:spPr>
+          <a:xfrm>
+            <a:off x="1000000" y="1830000"/>
+            <a:ext cx="10300000" cy="540000"/>
+          </a:xfrm>
+          <a:prstGeom prst="rect">
+            <a:avLst/>
+          </a:prstGeom>
+          <a:noFill/>
+        </p:spPr>
+        <p:txBody>
+          <a:bodyPr wrap="square" anchor="t">
+            <a:spAutoFit/>
+          </a:bodyPr>
+          <a:lstStyle/>
+          <a:p>
+            <a:pPr algn="l">
+              <a:lnSpc>
+                <a:spcPct val="110000"/>
+              </a:lnSpc>
+              <a:spcAft>
+                <a:spcPts val="600"/>
+              </a:spcAft>
+            </a:pPr>
+            <a:r>
+              <a:rPr sz="2000" b="1">
+                <a:solidFill>
+                  <a:srgbClr val="FFFFFF"/>
+                </a:solidFill>
+                <a:latin typeface="微软雅黑"/>
+              </a:rPr>
+              <a:t>B侧 · 第三种代码形态 · 企业级分层</a:t>
+            </a:r>
+            <a:endParaRPr sz="2000" b="1">
+              <a:solidFill>
+                <a:srgbClr val="FFFFFF"/>
+              </a:solidFill>
+              <a:latin typeface="微软雅黑" panose="020B0502040204020203" charset="-122"/>
+            </a:endParaRPr>
+          </a:p>
+        </p:txBody>
+      </p:sp>
+      <p:sp>
+        <p:nvSpPr>
+          <p:cNvPr id="7" name="Rectangle 6"/>
+          <p:cNvSpPr/>
+          <p:nvPr/>
+        </p:nvSpPr>
+        <p:spPr>
+          <a:xfrm>
+            <a:off x="760000" y="2650000"/>
+            <a:ext cx="5300000" cy="1500000"/>
+          </a:xfrm>
+          <a:prstGeom prst="rect">
+            <a:avLst/>
+          </a:prstGeom>
+          <a:solidFill>
+            <a:srgbClr val="F3F6FD"/>
+          </a:solidFill>
+          <a:ln>
+            <a:solidFill>
+              <a:srgbClr val="0545E8"/>
+            </a:solidFill>
+          </a:ln>
+          <a:effectLst/>
+        </p:spPr>
+        <p:style>
+          <a:lnRef idx="1">
+            <a:schemeClr val="accent1"/>
+          </a:lnRef>
+          <a:fillRef idx="3">
+            <a:schemeClr val="accent1"/>
+          </a:fillRef>
+          <a:effectRef idx="2">
+            <a:schemeClr val="accent1"/>
+          </a:effectRef>
+          <a:fontRef idx="minor">
+            <a:schemeClr val="lt1"/>
+          </a:fontRef>
+        </p:style>
+        <p:txBody>
+          <a:bodyPr rtlCol="0" anchor="ctr"/>
+          <a:lstStyle/>
+          <a:p>
+            <a:pPr algn="ctr"/>
+          </a:p>
+        </p:txBody>
+      </p:sp>
+      <p:sp>
+        <p:nvSpPr>
+          <p:cNvPr id="8" name="Rectangle 7"/>
+          <p:cNvSpPr/>
+          <p:nvPr/>
+        </p:nvSpPr>
+        <p:spPr>
+          <a:xfrm>
+            <a:off x="760000" y="2650000"/>
+            <a:ext cx="120000" cy="1500000"/>
+          </a:xfrm>
+          <a:prstGeom prst="rect">
+            <a:avLst/>
+          </a:prstGeom>
+          <a:solidFill>
+            <a:srgbClr val="0545E8"/>
+          </a:solidFill>
+          <a:ln>
+            <a:noFill/>
+          </a:ln>
+          <a:effectLst/>
+        </p:spPr>
+        <p:style>
+          <a:lnRef idx="1">
+            <a:schemeClr val="accent1"/>
+          </a:lnRef>
+          <a:fillRef idx="3">
+            <a:schemeClr val="accent1"/>
+          </a:fillRef>
+          <a:effectRef idx="2">
+            <a:schemeClr val="accent1"/>
+          </a:effectRef>
+          <a:fontRef idx="minor">
+            <a:schemeClr val="lt1"/>
+          </a:fontRef>
+        </p:style>
+        <p:txBody>
+          <a:bodyPr rtlCol="0" anchor="ctr"/>
+          <a:lstStyle/>
+          <a:p>
+            <a:pPr algn="ctr"/>
+          </a:p>
+        </p:txBody>
+      </p:sp>
+      <p:sp>
+        <p:nvSpPr>
+          <p:cNvPr id="9" name="TextBox 8"/>
+          <p:cNvSpPr txBox="1"/>
+          <p:nvPr/>
+        </p:nvSpPr>
+        <p:spPr>
+          <a:xfrm>
+            <a:off x="1000000" y="2750000"/>
+            <a:ext cx="1600000" cy="360000"/>
+          </a:xfrm>
+          <a:prstGeom prst="rect">
+            <a:avLst/>
+          </a:prstGeom>
+          <a:noFill/>
+        </p:spPr>
+        <p:txBody>
+          <a:bodyPr wrap="square" anchor="ctr">
+            <a:spAutoFit/>
+          </a:bodyPr>
+          <a:lstStyle/>
+          <a:p>
+            <a:pPr algn="l">
+              <a:lnSpc>
+                <a:spcPct val="110000"/>
+              </a:lnSpc>
+              <a:spcAft>
+                <a:spcPts val="600"/>
+              </a:spcAft>
+            </a:pPr>
+            <a:r>
+              <a:rPr sz="1400" b="1">
+                <a:solidFill>
+                  <a:srgbClr val="0545E8"/>
+                </a:solidFill>
+                <a:latin typeface="微软雅黑"/>
+              </a:rPr>
+              <a:t>◆ 为什么外置</a:t>
+            </a:r>
+            <a:endParaRPr sz="1400" b="1">
+              <a:solidFill>
+                <a:srgbClr val="0545E8"/>
+              </a:solidFill>
+              <a:latin typeface="微软雅黑" panose="020B0502040204020203" charset="-122"/>
+            </a:endParaRPr>
+          </a:p>
+        </p:txBody>
+      </p:sp>
+      <p:sp>
+        <p:nvSpPr>
+          <p:cNvPr id="10" name="TextBox 9"/>
+          <p:cNvSpPr txBox="1"/>
+          <p:nvPr/>
+        </p:nvSpPr>
+        <p:spPr>
+          <a:xfrm>
+            <a:off x="1000000" y="3170000"/>
+            <a:ext cx="4800000" cy="900000"/>
+          </a:xfrm>
+          <a:prstGeom prst="rect">
+            <a:avLst/>
+          </a:prstGeom>
+          <a:noFill/>
+        </p:spPr>
+        <p:txBody>
+          <a:bodyPr wrap="square" anchor="t">
+            <a:spAutoFit/>
+          </a:bodyPr>
+          <a:lstStyle/>
+          <a:p>
+            <a:pPr algn="l">
+              <a:lnSpc>
+                <a:spcPct val="130000"/>
+              </a:lnSpc>
+              <a:spcAft>
+                <a:spcPts val="600"/>
+              </a:spcAft>
+            </a:pPr>
+            <a:r>
+              <a:rPr sz="1300" b="0">
+                <a:solidFill>
+                  <a:srgbClr val="010328"/>
+                </a:solidFill>
+                <a:latin typeface="微软雅黑"/>
+              </a:rPr>
+              <a:t>训练集占比/门禁阈值/数据源全在 config/rules.yaml——业务规则与代码分离</a:t>
+            </a:r>
+            <a:endParaRPr sz="1300" b="0">
+              <a:solidFill>
+                <a:srgbClr val="010328"/>
+              </a:solidFill>
+              <a:latin typeface="微软雅黑" panose="020B0502040204020203" charset="-122"/>
+            </a:endParaRPr>
+          </a:p>
+        </p:txBody>
+      </p:sp>
+      <p:sp>
+        <p:nvSpPr>
+          <p:cNvPr id="11" name="Rectangle 10"/>
+          <p:cNvSpPr/>
+          <p:nvPr/>
+        </p:nvSpPr>
+        <p:spPr>
+          <a:xfrm>
+            <a:off x="760000" y="4300000"/>
+            <a:ext cx="5300000" cy="1500000"/>
+          </a:xfrm>
+          <a:prstGeom prst="rect">
+            <a:avLst/>
+          </a:prstGeom>
+          <a:solidFill>
+            <a:srgbClr val="F3F6FD"/>
+          </a:solidFill>
+          <a:ln>
+            <a:solidFill>
+              <a:srgbClr val="0475B6"/>
+            </a:solidFill>
+          </a:ln>
+          <a:effectLst/>
+        </p:spPr>
+        <p:style>
+          <a:lnRef idx="1">
+            <a:schemeClr val="accent1"/>
+          </a:lnRef>
+          <a:fillRef idx="3">
+            <a:schemeClr val="accent1"/>
+          </a:fillRef>
+          <a:effectRef idx="2">
+            <a:schemeClr val="accent1"/>
+          </a:effectRef>
+          <a:fontRef idx="minor">
+            <a:schemeClr val="lt1"/>
+          </a:fontRef>
+        </p:style>
+        <p:txBody>
+          <a:bodyPr rtlCol="0" anchor="ctr"/>
+          <a:lstStyle/>
+          <a:p>
+            <a:pPr algn="ctr"/>
+          </a:p>
+        </p:txBody>
+      </p:sp>
+      <p:sp>
+        <p:nvSpPr>
+          <p:cNvPr id="12" name="Rectangle 11"/>
+          <p:cNvSpPr/>
+          <p:nvPr/>
+        </p:nvSpPr>
+        <p:spPr>
+          <a:xfrm>
+            <a:off x="760000" y="4300000"/>
+            <a:ext cx="120000" cy="1500000"/>
+          </a:xfrm>
+          <a:prstGeom prst="rect">
+            <a:avLst/>
+          </a:prstGeom>
+          <a:solidFill>
+            <a:srgbClr val="0475B6"/>
+          </a:solidFill>
+          <a:ln>
+            <a:noFill/>
+          </a:ln>
+          <a:effectLst/>
+        </p:spPr>
+        <p:style>
+          <a:lnRef idx="1">
+            <a:schemeClr val="accent1"/>
+          </a:lnRef>
+          <a:fillRef idx="3">
+            <a:schemeClr val="accent1"/>
+          </a:fillRef>
+          <a:effectRef idx="2">
+            <a:schemeClr val="accent1"/>
+          </a:effectRef>
+          <a:fontRef idx="minor">
+            <a:schemeClr val="lt1"/>
+          </a:fontRef>
+        </p:style>
+        <p:txBody>
+          <a:bodyPr rtlCol="0" anchor="ctr"/>
+          <a:lstStyle/>
+          <a:p>
+            <a:pPr algn="ctr"/>
+          </a:p>
+        </p:txBody>
+      </p:sp>
+      <p:sp>
+        <p:nvSpPr>
+          <p:cNvPr id="13" name="TextBox 12"/>
+          <p:cNvSpPr txBox="1"/>
+          <p:nvPr/>
+        </p:nvSpPr>
+        <p:spPr>
+          <a:xfrm>
+            <a:off x="1000000" y="4400000"/>
+            <a:ext cx="1600000" cy="360000"/>
+          </a:xfrm>
+          <a:prstGeom prst="rect">
+            <a:avLst/>
+          </a:prstGeom>
+          <a:noFill/>
+        </p:spPr>
+        <p:txBody>
+          <a:bodyPr wrap="square" anchor="ctr">
+            <a:spAutoFit/>
+          </a:bodyPr>
+          <a:lstStyle/>
+          <a:p>
+            <a:pPr algn="l">
+              <a:lnSpc>
+                <a:spcPct val="110000"/>
+              </a:lnSpc>
+              <a:spcAft>
+                <a:spcPts val="600"/>
+              </a:spcAft>
+            </a:pPr>
+            <a:r>
+              <a:rPr sz="1400" b="1">
+                <a:solidFill>
+                  <a:srgbClr val="0475B6"/>
+                </a:solidFill>
+                <a:latin typeface="微软雅黑"/>
+              </a:rPr>
+              <a:t>◆ 收益</a:t>
+            </a:r>
+            <a:endParaRPr sz="1400" b="1">
+              <a:solidFill>
+                <a:srgbClr val="0475B6"/>
+              </a:solidFill>
+              <a:latin typeface="微软雅黑" panose="020B0502040204020203" charset="-122"/>
+            </a:endParaRPr>
+          </a:p>
+        </p:txBody>
+      </p:sp>
+      <p:sp>
+        <p:nvSpPr>
+          <p:cNvPr id="14" name="TextBox 13"/>
+          <p:cNvSpPr txBox="1"/>
+          <p:nvPr/>
+        </p:nvSpPr>
+        <p:spPr>
+          <a:xfrm>
+            <a:off x="1000000" y="4820000"/>
+            <a:ext cx="4800000" cy="900000"/>
+          </a:xfrm>
+          <a:prstGeom prst="rect">
+            <a:avLst/>
+          </a:prstGeom>
+          <a:noFill/>
+        </p:spPr>
+        <p:txBody>
+          <a:bodyPr wrap="square" anchor="t">
+            <a:spAutoFit/>
+          </a:bodyPr>
+          <a:lstStyle/>
+          <a:p>
+            <a:pPr algn="l">
+              <a:lnSpc>
+                <a:spcPct val="130000"/>
+              </a:lnSpc>
+              <a:spcAft>
+                <a:spcPts val="600"/>
+              </a:spcAft>
+            </a:pPr>
+            <a:r>
+              <a:rPr sz="1300" b="0">
+                <a:solidFill>
+                  <a:srgbClr val="010328"/>
+                </a:solidFill>
+                <a:latin typeface="微软雅黑"/>
+              </a:rPr>
+              <a:t>种子固定结果可复现；改 min_f1/test_size 不动逻辑——模型验收口径集中一处</a:t>
+            </a:r>
+            <a:endParaRPr sz="1300" b="0">
+              <a:solidFill>
+                <a:srgbClr val="010328"/>
+              </a:solidFill>
+              <a:latin typeface="微软雅黑" panose="020B0502040204020203" charset="-122"/>
+            </a:endParaRPr>
+          </a:p>
+        </p:txBody>
+      </p:sp>
+      <p:sp>
+        <p:nvSpPr>
+          <p:cNvPr id="15" name="Rectangle 14"/>
+          <p:cNvSpPr/>
+          <p:nvPr/>
+        </p:nvSpPr>
+        <p:spPr>
+          <a:xfrm>
+            <a:off x="6300000" y="2650000"/>
+            <a:ext cx="5360000" cy="1500000"/>
+          </a:xfrm>
+          <a:prstGeom prst="rect">
+            <a:avLst/>
+          </a:prstGeom>
+          <a:solidFill>
+            <a:srgbClr val="0D112A"/>
+          </a:solidFill>
+          <a:ln>
+            <a:noFill/>
+          </a:ln>
+          <a:effectLst/>
+        </p:spPr>
+        <p:style>
+          <a:lnRef idx="1">
+            <a:schemeClr val="accent1"/>
+          </a:lnRef>
+          <a:fillRef idx="3">
+            <a:schemeClr val="accent1"/>
+          </a:fillRef>
+          <a:effectRef idx="2">
+            <a:schemeClr val="accent1"/>
+          </a:effectRef>
+          <a:fontRef idx="minor">
+            <a:schemeClr val="lt1"/>
+          </a:fontRef>
+        </p:style>
+        <p:txBody>
+          <a:bodyPr rtlCol="0" anchor="ctr"/>
+          <a:lstStyle/>
+          <a:p>
+            <a:pPr algn="ctr"/>
+          </a:p>
+        </p:txBody>
+      </p:sp>
+      <p:sp>
+        <p:nvSpPr>
+          <p:cNvPr id="16" name="Rectangle 15"/>
+          <p:cNvSpPr/>
+          <p:nvPr/>
+        </p:nvSpPr>
+        <p:spPr>
+          <a:xfrm>
+            <a:off x="6300000" y="2650000"/>
+            <a:ext cx="5360000" cy="120000"/>
+          </a:xfrm>
+          <a:prstGeom prst="rect">
+            <a:avLst/>
+          </a:prstGeom>
+          <a:solidFill>
+            <a:srgbClr val="F5670F"/>
+          </a:solidFill>
+          <a:ln>
+            <a:noFill/>
+          </a:ln>
+          <a:effectLst/>
+        </p:spPr>
+        <p:style>
+          <a:lnRef idx="1">
+            <a:schemeClr val="accent1"/>
+          </a:lnRef>
+          <a:fillRef idx="3">
+            <a:schemeClr val="accent1"/>
+          </a:fillRef>
+          <a:effectRef idx="2">
+            <a:schemeClr val="accent1"/>
+          </a:effectRef>
+          <a:fontRef idx="minor">
+            <a:schemeClr val="lt1"/>
+          </a:fontRef>
+        </p:style>
+        <p:txBody>
+          <a:bodyPr rtlCol="0" anchor="ctr"/>
+          <a:lstStyle/>
+          <a:p>
+            <a:pPr algn="ctr"/>
+          </a:p>
+        </p:txBody>
+      </p:sp>
+      <p:sp>
+        <p:nvSpPr>
+          <p:cNvPr id="17" name="TextBox 16"/>
+          <p:cNvSpPr txBox="1"/>
+          <p:nvPr/>
+        </p:nvSpPr>
+        <p:spPr>
+          <a:xfrm>
+            <a:off x="6600000" y="2930000"/>
+            <a:ext cx="4800000" cy="1100000"/>
+          </a:xfrm>
+          <a:prstGeom prst="rect">
+            <a:avLst/>
+          </a:prstGeom>
+          <a:noFill/>
+        </p:spPr>
+        <p:txBody>
+          <a:bodyPr wrap="square" anchor="t">
+            <a:spAutoFit/>
+          </a:bodyPr>
+          <a:lstStyle/>
+          <a:p>
+            <a:pPr algn="l">
+              <a:lnSpc>
+                <a:spcPct val="125000"/>
+              </a:lnSpc>
+              <a:spcAft>
+                <a:spcPts val="600"/>
+              </a:spcAft>
+            </a:pPr>
+            <a:r>
+              <a:rPr sz="1150" b="0">
+                <a:solidFill>
+                  <a:srgbClr val="D6DEF6"/>
+                </a:solidFill>
+                <a:latin typeface="微软雅黑"/>
+              </a:rPr>
+              <a:t>def test_gate_pass(metrics):</a:t>
+            </a:r>
+            <a:endParaRPr sz="1150" b="0">
+              <a:solidFill>
+                <a:srgbClr val="D6DEF6"/>
+              </a:solidFill>
+              <a:latin typeface="微软雅黑" panose="020B0502040204020203" charset="-122"/>
+            </a:endParaRPr>
+          </a:p>
+          <a:p>
+            <a:r>
+              <a:rPr sz="1150" b="0">
+                <a:solidFill>
+                  <a:srgbClr val="D6DEF6"/>
+                </a:solidFill>
+                <a:latin typeface="微软雅黑"/>
+              </a:rPr>
+              <a:t>    assert gate(metrics, min_f1=0.80) is True</a:t>
+            </a:r>
+          </a:p>
+          <a:p>
+            <a:r>
+              <a:rPr sz="1150" b="0">
+                <a:solidFill>
+                  <a:srgbClr val="D6DEF6"/>
+                </a:solidFill>
+                <a:latin typeface="微软雅黑"/>
+              </a:rPr>
+              <a:t/>
+            </a:r>
+          </a:p>
+          <a:p>
+            <a:r>
+              <a:rPr sz="1150" b="0">
+                <a:solidFill>
+                  <a:srgbClr val="D6DEF6"/>
+                </a:solidFill>
+                <a:latin typeface="微软雅黑"/>
+              </a:rPr>
+              <a:t>def test_gate_fail(metrics):</a:t>
+            </a:r>
+          </a:p>
+          <a:p>
+            <a:r>
+              <a:rPr sz="1150" b="0">
+                <a:solidFill>
+                  <a:srgbClr val="D6DEF6"/>
+                </a:solidFill>
+                <a:latin typeface="微软雅黑"/>
+              </a:rPr>
+              <a:t>    low = {"macro_f1": 0.55}</a:t>
+            </a:r>
+          </a:p>
+          <a:p>
+            <a:r>
+              <a:rPr sz="1150" b="0">
+                <a:solidFill>
+                  <a:srgbClr val="D6DEF6"/>
+                </a:solidFill>
+                <a:latin typeface="微软雅黑"/>
+              </a:rPr>
+              <a:t>    assert gate(low, min_f1=0.80) is False</a:t>
+            </a:r>
+          </a:p>
+        </p:txBody>
+      </p:sp>
+      <p:sp>
+        <p:nvSpPr>
+          <p:cNvPr id="18" name="Rectangle 17"/>
+          <p:cNvSpPr/>
+          <p:nvPr/>
+        </p:nvSpPr>
+        <p:spPr>
+          <a:xfrm>
+            <a:off x="6300000" y="4300000"/>
+            <a:ext cx="5360000" cy="1500000"/>
+          </a:xfrm>
+          <a:prstGeom prst="rect">
+            <a:avLst/>
+          </a:prstGeom>
+          <a:solidFill>
+            <a:srgbClr val="FFFFFF"/>
+          </a:solidFill>
+          <a:ln>
+            <a:solidFill>
+              <a:srgbClr val="F5670F"/>
+            </a:solidFill>
+          </a:ln>
+          <a:effectLst/>
+        </p:spPr>
+        <p:style>
+          <a:lnRef idx="1">
+            <a:schemeClr val="accent1"/>
+          </a:lnRef>
+          <a:fillRef idx="3">
+            <a:schemeClr val="accent1"/>
+          </a:fillRef>
+          <a:effectRef idx="2">
+            <a:schemeClr val="accent1"/>
+          </a:effectRef>
+          <a:fontRef idx="minor">
+            <a:schemeClr val="lt1"/>
+          </a:fontRef>
+        </p:style>
+        <p:txBody>
+          <a:bodyPr rtlCol="0" anchor="ctr"/>
+          <a:lstStyle/>
+          <a:p>
+            <a:pPr algn="ctr"/>
+          </a:p>
+        </p:txBody>
+      </p:sp>
+      <p:sp>
+        <p:nvSpPr>
+          <p:cNvPr id="19" name="TextBox 18"/>
+          <p:cNvSpPr txBox="1"/>
+          <p:nvPr/>
+        </p:nvSpPr>
+        <p:spPr>
+          <a:xfrm>
+            <a:off x="6600000" y="4400000"/>
+            <a:ext cx="2000000" cy="360000"/>
+          </a:xfrm>
+          <a:prstGeom prst="rect">
+            <a:avLst/>
+          </a:prstGeom>
+          <a:noFill/>
+        </p:spPr>
+        <p:txBody>
+          <a:bodyPr wrap="square" anchor="ctr">
+            <a:spAutoFit/>
+          </a:bodyPr>
+          <a:lstStyle/>
+          <a:p>
+            <a:pPr algn="l">
+              <a:lnSpc>
+                <a:spcPct val="110000"/>
+              </a:lnSpc>
+              <a:spcAft>
+                <a:spcPts val="600"/>
+              </a:spcAft>
+            </a:pPr>
+            <a:r>
+              <a:rPr sz="1400" b="1">
+                <a:solidFill>
+                  <a:srgbClr val="F5670F"/>
+                </a:solidFill>
+                <a:latin typeface="微软雅黑"/>
+              </a:rPr>
+              <a:t>◆ 设计要点</a:t>
+            </a:r>
+            <a:endParaRPr sz="1400" b="1">
+              <a:solidFill>
+                <a:srgbClr val="F5670F"/>
+              </a:solidFill>
+              <a:latin typeface="微软雅黑" panose="020B0502040204020203" charset="-122"/>
+            </a:endParaRPr>
+          </a:p>
+        </p:txBody>
+      </p:sp>
+      <p:sp>
+        <p:nvSpPr>
+          <p:cNvPr id="20" name="TextBox 19"/>
+          <p:cNvSpPr txBox="1"/>
+          <p:nvPr/>
+        </p:nvSpPr>
+        <p:spPr>
+          <a:xfrm>
+            <a:off x="6600000" y="4820000"/>
+            <a:ext cx="4800000" cy="900000"/>
+          </a:xfrm>
+          <a:prstGeom prst="rect">
+            <a:avLst/>
+          </a:prstGeom>
+          <a:noFill/>
+        </p:spPr>
+        <p:txBody>
+          <a:bodyPr wrap="square" anchor="t">
+            <a:spAutoFit/>
+          </a:bodyPr>
+          <a:lstStyle/>
+          <a:p>
+            <a:pPr algn="l">
+              <a:lnSpc>
+                <a:spcPct val="130000"/>
+              </a:lnSpc>
+              <a:spcAft>
+                <a:spcPts val="600"/>
+              </a:spcAft>
+            </a:pPr>
+            <a:r>
+              <a:rPr sz="1300" b="0">
+                <a:solidFill>
+                  <a:srgbClr val="010328"/>
+                </a:solidFill>
+                <a:latin typeface="微软雅黑"/>
+              </a:rPr>
+              <a:t>config.py 用 YAML 加载 + yaml_lite 兜底；非法配置启动即校验并拒绝</a:t>
+            </a:r>
+            <a:endParaRPr sz="1300" b="0">
+              <a:solidFill>
+                <a:srgbClr val="FF0000"/>
+              </a:solidFill>
+              <a:latin typeface="微软雅黑" panose="020B0502040204020203" charset="-122"/>
+            </a:endParaRPr>
+          </a:p>
+        </p:txBody>
+      </p:sp>
+      <p:sp>
+        <p:nvSpPr>
+          <p:cNvPr id="21" name="Rectangle 20"/>
+          <p:cNvSpPr/>
+          <p:nvPr/>
+        </p:nvSpPr>
+        <p:spPr>
+          <a:xfrm>
+            <a:off x="500000" y="6500000"/>
+            <a:ext cx="11100000" cy="20000"/>
+          </a:xfrm>
+          <a:prstGeom prst="rect">
+            <a:avLst/>
+          </a:prstGeom>
+          <a:solidFill>
+            <a:srgbClr val="C9D4EE"/>
+          </a:solidFill>
+          <a:ln>
+            <a:noFill/>
+          </a:ln>
+          <a:effectLst/>
+        </p:spPr>
+        <p:style>
+          <a:lnRef idx="1">
+            <a:schemeClr val="accent1"/>
+          </a:lnRef>
+          <a:fillRef idx="3">
+            <a:schemeClr val="accent1"/>
+          </a:fillRef>
+          <a:effectRef idx="2">
+            <a:schemeClr val="accent1"/>
+          </a:effectRef>
+          <a:fontRef idx="minor">
+            <a:schemeClr val="lt1"/>
+          </a:fontRef>
+        </p:style>
+        <p:txBody>
+          <a:bodyPr rtlCol="0" anchor="ctr"/>
+          <a:lstStyle/>
+          <a:p>
+            <a:pPr algn="ctr"/>
+          </a:p>
+        </p:txBody>
+      </p:sp>
+      <p:sp>
+        <p:nvSpPr>
+          <p:cNvPr id="22" name="TextBox 21"/>
+          <p:cNvSpPr txBox="1"/>
+          <p:nvPr/>
+        </p:nvSpPr>
+        <p:spPr>
+          <a:xfrm>
+            <a:off x="500000" y="6540000"/>
+            <a:ext cx="7000000" cy="300000"/>
+          </a:xfrm>
+          <a:prstGeom prst="rect">
+            <a:avLst/>
+          </a:prstGeom>
+          <a:noFill/>
+        </p:spPr>
+        <p:txBody>
+          <a:bodyPr wrap="square" anchor="t">
+            <a:spAutoFit/>
+          </a:bodyPr>
+          <a:lstStyle/>
+          <a:p>
+            <a:pPr algn="l">
+              <a:lnSpc>
+                <a:spcPct val="110000"/>
+              </a:lnSpc>
+              <a:spcAft>
+                <a:spcPts val="600"/>
+              </a:spcAft>
+            </a:pPr>
+            <a:r>
+              <a:rPr sz="1000" b="0">
+                <a:solidFill>
+                  <a:srgbClr val="8A97B5"/>
+                </a:solidFill>
+                <a:latin typeface="微软雅黑" panose="020B0502040204020203" charset="-122"/>
+              </a:rPr>
+              <a:t>两江智造集团 · Python程序设计（项目实战）</a:t>
+            </a:r>
+            <a:endParaRPr sz="1000" b="0">
+              <a:solidFill>
+                <a:srgbClr val="8A97B5"/>
+              </a:solidFill>
+              <a:latin typeface="微软雅黑" panose="020B0502040204020203" charset="-122"/>
+            </a:endParaRPr>
+          </a:p>
+        </p:txBody>
+      </p:sp>
+      <p:sp>
+        <p:nvSpPr>
+          <p:cNvPr id="23" name="TextBox 22"/>
+          <p:cNvSpPr txBox="1"/>
+          <p:nvPr/>
+        </p:nvSpPr>
+        <p:spPr>
+          <a:xfrm>
+            <a:off x="10600000" y="6540000"/>
+            <a:ext cx="1000000" cy="300000"/>
+          </a:xfrm>
+          <a:prstGeom prst="rect">
+            <a:avLst/>
+          </a:prstGeom>
+          <a:noFill/>
+        </p:spPr>
+        <p:txBody>
+          <a:bodyPr wrap="square" anchor="t">
+            <a:spAutoFit/>
+          </a:bodyPr>
+          <a:lstStyle/>
+          <a:p>
+            <a:pPr algn="r">
+              <a:lnSpc>
+                <a:spcPct val="110000"/>
+              </a:lnSpc>
+              <a:spcAft>
+                <a:spcPts val="600"/>
+              </a:spcAft>
+            </a:pPr>
+            <a:r>
+              <a:rPr sz="1000" b="0">
+                <a:solidFill>
+                  <a:srgbClr val="8A97B5"/>
+                </a:solidFill>
+                <a:latin typeface="微软雅黑"/>
+              </a:rPr>
+              <a:t>32 / 64</a:t>
+            </a:r>
+            <a:endParaRPr sz="1000" b="0">
+              <a:solidFill>
+                <a:srgbClr val="8A97B5"/>
+              </a:solidFill>
+              <a:latin typeface="微软雅黑" panose="020B0502040204020203" charset="-122"/>
+            </a:endParaRPr>
+          </a:p>
+        </p:txBody>
+      </p:sp>
+    </p:spTree>
+  </p:cSld>
+  <p:clrMapOvr>
+    <a:masterClrMapping/>
+  </p:clrMapOvr>
+</p:sld>
+</file>
+
+<file path=ppt/slides/slide64.xml><?xml version="1.0" encoding="utf-8"?>
+<p:sld xmlns:a="http://schemas.openxmlformats.org/drawingml/2006/main" xmlns:p="http://schemas.openxmlformats.org/presentationml/2006/main" xmlns:r="http://schemas.openxmlformats.org/officeDocument/2006/relationships">
+  <p:cSld>
+    <p:spTree>
+      <p:nvGrpSpPr>
+        <p:cNvPr id="1" name=""/>
+        <p:cNvGrpSpPr/>
+        <p:nvPr/>
+      </p:nvGrpSpPr>
+      <p:grpSpPr/>
+      <p:sp>
+        <p:nvSpPr>
+          <p:cNvPr id="2" name="Rectangle 1"/>
+          <p:cNvSpPr/>
+          <p:nvPr/>
+        </p:nvSpPr>
+        <p:spPr>
+          <a:xfrm>
+            <a:off x="0" y="0"/>
+            <a:ext cx="12192000" cy="1150000"/>
+          </a:xfrm>
+          <a:prstGeom prst="rect">
+            <a:avLst/>
+          </a:prstGeom>
+          <a:solidFill>
+            <a:srgbClr val="010328"/>
+          </a:solidFill>
+          <a:ln>
+            <a:noFill/>
+          </a:ln>
+          <a:effectLst/>
+        </p:spPr>
+        <p:style>
+          <a:lnRef idx="1">
+            <a:schemeClr val="accent1"/>
+          </a:lnRef>
+          <a:fillRef idx="3">
+            <a:schemeClr val="accent1"/>
+          </a:fillRef>
+          <a:effectRef idx="2">
+            <a:schemeClr val="accent1"/>
+          </a:effectRef>
+          <a:fontRef idx="minor">
+            <a:schemeClr val="lt1"/>
+          </a:fontRef>
+        </p:style>
+        <p:txBody>
+          <a:bodyPr rtlCol="0" anchor="ctr"/>
+          <a:lstStyle/>
+          <a:p>
+            <a:pPr algn="ctr"/>
+          </a:p>
+        </p:txBody>
+      </p:sp>
+      <p:sp>
+        <p:nvSpPr>
+          <p:cNvPr id="3" name="Rectangle 2"/>
+          <p:cNvSpPr/>
+          <p:nvPr/>
+        </p:nvSpPr>
+        <p:spPr>
+          <a:xfrm>
+            <a:off x="0" y="1150000"/>
+            <a:ext cx="2600000" cy="70000"/>
+          </a:xfrm>
+          <a:prstGeom prst="rect">
+            <a:avLst/>
+          </a:prstGeom>
+          <a:solidFill>
+            <a:srgbClr val="F5670F"/>
+          </a:solidFill>
+          <a:ln>
+            <a:noFill/>
+          </a:ln>
+          <a:effectLst/>
+        </p:spPr>
+        <p:style>
+          <a:lnRef idx="1">
+            <a:schemeClr val="accent1"/>
+          </a:lnRef>
+          <a:fillRef idx="3">
+            <a:schemeClr val="accent1"/>
+          </a:fillRef>
+          <a:effectRef idx="2">
+            <a:schemeClr val="accent1"/>
+          </a:effectRef>
+          <a:fontRef idx="minor">
+            <a:schemeClr val="lt1"/>
+          </a:fontRef>
+        </p:style>
+        <p:txBody>
+          <a:bodyPr rtlCol="0" anchor="ctr"/>
+          <a:lstStyle/>
+          <a:p>
+            <a:pPr algn="ctr"/>
+          </a:p>
+        </p:txBody>
+      </p:sp>
+      <p:sp>
+        <p:nvSpPr>
+          <p:cNvPr id="4" name="TextBox 3"/>
+          <p:cNvSpPr txBox="1"/>
+          <p:nvPr/>
+        </p:nvSpPr>
+        <p:spPr>
+          <a:xfrm>
+            <a:off x="700000" y="300000"/>
+            <a:ext cx="10792000" cy="700000"/>
+          </a:xfrm>
+          <a:prstGeom prst="rect">
+            <a:avLst/>
+          </a:prstGeom>
+          <a:noFill/>
+        </p:spPr>
+        <p:txBody>
+          <a:bodyPr wrap="square" anchor="t">
+            <a:spAutoFit/>
+          </a:bodyPr>
+          <a:lstStyle/>
+          <a:p>
+            <a:pPr algn="l">
+              <a:lnSpc>
+                <a:spcPct val="110000"/>
+              </a:lnSpc>
+              <a:spcAft>
+                <a:spcPts val="600"/>
+              </a:spcAft>
+            </a:pPr>
+            <a:r>
+              <a:rPr sz="2400" b="1">
+                <a:solidFill>
+                  <a:srgbClr val="FFFFFF"/>
+                </a:solidFill>
+                <a:latin typeface="微软雅黑"/>
+              </a:rPr>
+              <a:t>工程化测试：单测怎么证可靠（GB/T 15532）</a:t>
+            </a:r>
+            <a:endParaRPr sz="2400" b="1">
+              <a:solidFill>
+                <a:srgbClr val="FFFFFF"/>
+              </a:solidFill>
+              <a:latin typeface="微软雅黑" panose="020B0502040204020203" charset="-122"/>
+            </a:endParaRPr>
+          </a:p>
+        </p:txBody>
+      </p:sp>
+      <p:sp>
+        <p:nvSpPr>
+          <p:cNvPr id="5" name="Rectangle 4"/>
+          <p:cNvSpPr/>
+          <p:nvPr/>
+        </p:nvSpPr>
+        <p:spPr>
+          <a:xfrm>
+            <a:off x="760000" y="1750000"/>
+            <a:ext cx="10900000" cy="700000"/>
+          </a:xfrm>
+          <a:prstGeom prst="rect">
+            <a:avLst/>
+          </a:prstGeom>
+          <a:solidFill>
+            <a:srgbClr val="010328"/>
+          </a:solidFill>
+          <a:ln>
+            <a:noFill/>
+          </a:ln>
+          <a:effectLst/>
+        </p:spPr>
+        <p:style>
+          <a:lnRef idx="1">
+            <a:schemeClr val="accent1"/>
+          </a:lnRef>
+          <a:fillRef idx="3">
+            <a:schemeClr val="accent1"/>
+          </a:fillRef>
+          <a:effectRef idx="2">
+            <a:schemeClr val="accent1"/>
+          </a:effectRef>
+          <a:fontRef idx="minor">
+            <a:schemeClr val="lt1"/>
+          </a:fontRef>
+        </p:style>
+        <p:txBody>
+          <a:bodyPr rtlCol="0" anchor="ctr"/>
+          <a:lstStyle/>
+          <a:p>
+            <a:pPr algn="ctr"/>
+          </a:p>
+        </p:txBody>
+      </p:sp>
+      <p:sp>
+        <p:nvSpPr>
+          <p:cNvPr id="6" name="TextBox 5"/>
+          <p:cNvSpPr txBox="1"/>
+          <p:nvPr/>
+        </p:nvSpPr>
+        <p:spPr>
+          <a:xfrm>
+            <a:off x="1000000" y="1830000"/>
+            <a:ext cx="10300000" cy="540000"/>
+          </a:xfrm>
+          <a:prstGeom prst="rect">
+            <a:avLst/>
+          </a:prstGeom>
+          <a:noFill/>
+        </p:spPr>
+        <p:txBody>
+          <a:bodyPr wrap="square" anchor="t">
+            <a:spAutoFit/>
+          </a:bodyPr>
+          <a:lstStyle/>
+          <a:p>
+            <a:pPr algn="l">
+              <a:lnSpc>
+                <a:spcPct val="110000"/>
+              </a:lnSpc>
+              <a:spcAft>
+                <a:spcPts val="600"/>
+              </a:spcAft>
+            </a:pPr>
+            <a:r>
+              <a:rPr sz="2000" b="1">
+                <a:solidFill>
+                  <a:srgbClr val="FFFFFF"/>
+                </a:solidFill>
+                <a:latin typeface="微软雅黑"/>
+              </a:rPr>
+              <a:t>测试计划与报告 · pytest 三层策略</a:t>
+            </a:r>
+            <a:endParaRPr sz="2000" b="1">
+              <a:solidFill>
+                <a:srgbClr val="FFFFFF"/>
+              </a:solidFill>
+              <a:latin typeface="微软雅黑" panose="020B0502040204020203" charset="-122"/>
+            </a:endParaRPr>
+          </a:p>
+        </p:txBody>
+      </p:sp>
+      <p:sp>
+        <p:nvSpPr>
+          <p:cNvPr id="7" name="Rectangle 6"/>
+          <p:cNvSpPr/>
+          <p:nvPr/>
+        </p:nvSpPr>
+        <p:spPr>
+          <a:xfrm>
+            <a:off x="760000" y="2650000"/>
+            <a:ext cx="5300000" cy="1500000"/>
+          </a:xfrm>
+          <a:prstGeom prst="rect">
+            <a:avLst/>
+          </a:prstGeom>
+          <a:solidFill>
+            <a:srgbClr val="F3F6FD"/>
+          </a:solidFill>
+          <a:ln>
+            <a:solidFill>
+              <a:srgbClr val="0545E8"/>
+            </a:solidFill>
+          </a:ln>
+          <a:effectLst/>
+        </p:spPr>
+        <p:style>
+          <a:lnRef idx="1">
+            <a:schemeClr val="accent1"/>
+          </a:lnRef>
+          <a:fillRef idx="3">
+            <a:schemeClr val="accent1"/>
+          </a:fillRef>
+          <a:effectRef idx="2">
+            <a:schemeClr val="accent1"/>
+          </a:effectRef>
+          <a:fontRef idx="minor">
+            <a:schemeClr val="lt1"/>
+          </a:fontRef>
+        </p:style>
+        <p:txBody>
+          <a:bodyPr rtlCol="0" anchor="ctr"/>
+          <a:lstStyle/>
+          <a:p>
+            <a:pPr algn="ctr"/>
+          </a:p>
+        </p:txBody>
+      </p:sp>
+      <p:sp>
+        <p:nvSpPr>
+          <p:cNvPr id="8" name="Rectangle 7"/>
+          <p:cNvSpPr/>
+          <p:nvPr/>
+        </p:nvSpPr>
+        <p:spPr>
+          <a:xfrm>
+            <a:off x="760000" y="2650000"/>
+            <a:ext cx="120000" cy="1500000"/>
+          </a:xfrm>
+          <a:prstGeom prst="rect">
+            <a:avLst/>
+          </a:prstGeom>
+          <a:solidFill>
+            <a:srgbClr val="0545E8"/>
+          </a:solidFill>
+          <a:ln>
+            <a:noFill/>
+          </a:ln>
+          <a:effectLst/>
+        </p:spPr>
+        <p:style>
+          <a:lnRef idx="1">
+            <a:schemeClr val="accent1"/>
+          </a:lnRef>
+          <a:fillRef idx="3">
+            <a:schemeClr val="accent1"/>
+          </a:fillRef>
+          <a:effectRef idx="2">
+            <a:schemeClr val="accent1"/>
+          </a:effectRef>
+          <a:fontRef idx="minor">
+            <a:schemeClr val="lt1"/>
+          </a:fontRef>
+        </p:style>
+        <p:txBody>
+          <a:bodyPr rtlCol="0" anchor="ctr"/>
+          <a:lstStyle/>
+          <a:p>
+            <a:pPr algn="ctr"/>
+          </a:p>
+        </p:txBody>
+      </p:sp>
+      <p:sp>
+        <p:nvSpPr>
+          <p:cNvPr id="9" name="TextBox 8"/>
+          <p:cNvSpPr txBox="1"/>
+          <p:nvPr/>
+        </p:nvSpPr>
+        <p:spPr>
+          <a:xfrm>
+            <a:off x="1000000" y="2750000"/>
+            <a:ext cx="1600000" cy="360000"/>
+          </a:xfrm>
+          <a:prstGeom prst="rect">
+            <a:avLst/>
+          </a:prstGeom>
+          <a:noFill/>
+        </p:spPr>
+        <p:txBody>
+          <a:bodyPr wrap="square" anchor="ctr">
+            <a:spAutoFit/>
+          </a:bodyPr>
+          <a:lstStyle/>
+          <a:p>
+            <a:pPr algn="l">
+              <a:lnSpc>
+                <a:spcPct val="110000"/>
+              </a:lnSpc>
+              <a:spcAft>
+                <a:spcPts val="600"/>
+              </a:spcAft>
+            </a:pPr>
+            <a:r>
+              <a:rPr sz="1400" b="1">
+                <a:solidFill>
+                  <a:srgbClr val="0545E8"/>
+                </a:solidFill>
+                <a:latin typeface="微软雅黑"/>
+              </a:rPr>
+              <a:t>◆ 纯函数单测</a:t>
+            </a:r>
+            <a:endParaRPr sz="1400" b="1">
+              <a:solidFill>
+                <a:srgbClr val="0545E8"/>
+              </a:solidFill>
+              <a:latin typeface="微软雅黑" panose="020B0502040204020203" charset="-122"/>
+            </a:endParaRPr>
+          </a:p>
+        </p:txBody>
+      </p:sp>
+      <p:sp>
+        <p:nvSpPr>
+          <p:cNvPr id="10" name="TextBox 9"/>
+          <p:cNvSpPr txBox="1"/>
+          <p:nvPr/>
+        </p:nvSpPr>
+        <p:spPr>
+          <a:xfrm>
+            <a:off x="1000000" y="3170000"/>
+            <a:ext cx="4800000" cy="900000"/>
+          </a:xfrm>
+          <a:prstGeom prst="rect">
+            <a:avLst/>
+          </a:prstGeom>
+          <a:noFill/>
+        </p:spPr>
+        <p:txBody>
+          <a:bodyPr wrap="square" anchor="t">
+            <a:spAutoFit/>
+          </a:bodyPr>
+          <a:lstStyle/>
+          <a:p>
+            <a:pPr algn="l">
+              <a:lnSpc>
+                <a:spcPct val="130000"/>
+              </a:lnSpc>
+              <a:spcAft>
+                <a:spcPts val="600"/>
+              </a:spcAft>
+            </a:pPr>
+            <a:r>
+              <a:rPr sz="1300" b="0">
+                <a:solidFill>
+                  <a:srgbClr val="010328"/>
+                </a:solidFill>
+                <a:latin typeface="微软雅黑"/>
+              </a:rPr>
+              <a:t>复现: python -m pytest -q ｜ 用例≥6 全绿</a:t>
+            </a:r>
+            <a:endParaRPr sz="1300" b="0">
+              <a:solidFill>
+                <a:srgbClr val="010328"/>
+              </a:solidFill>
+              <a:latin typeface="微软雅黑" panose="020B0502040204020203" charset="-122"/>
+            </a:endParaRPr>
+          </a:p>
+          <a:p>
+            <a:r>
+              <a:rPr sz="1300" b="0">
+                <a:solidFill>
+                  <a:srgbClr val="010328"/>
+                </a:solidFill>
+                <a:latin typeface="微软雅黑"/>
+              </a:rPr>
+              <a:t>按 正常/边界/异常 三档覆盖——可靠性是被测出来的</a:t>
+            </a:r>
+          </a:p>
+        </p:txBody>
+      </p:sp>
+      <p:sp>
+        <p:nvSpPr>
+          <p:cNvPr id="11" name="Rectangle 10"/>
+          <p:cNvSpPr/>
+          <p:nvPr/>
+        </p:nvSpPr>
+        <p:spPr>
+          <a:xfrm>
+            <a:off x="760000" y="4300000"/>
+            <a:ext cx="5300000" cy="1500000"/>
+          </a:xfrm>
+          <a:prstGeom prst="rect">
+            <a:avLst/>
+          </a:prstGeom>
+          <a:solidFill>
+            <a:srgbClr val="F3F6FD"/>
+          </a:solidFill>
+          <a:ln>
+            <a:solidFill>
+              <a:srgbClr val="0475B6"/>
+            </a:solidFill>
+          </a:ln>
+          <a:effectLst/>
+        </p:spPr>
+        <p:style>
+          <a:lnRef idx="1">
+            <a:schemeClr val="accent1"/>
+          </a:lnRef>
+          <a:fillRef idx="3">
+            <a:schemeClr val="accent1"/>
+          </a:fillRef>
+          <a:effectRef idx="2">
+            <a:schemeClr val="accent1"/>
+          </a:effectRef>
+          <a:fontRef idx="minor">
+            <a:schemeClr val="lt1"/>
+          </a:fontRef>
+        </p:style>
+        <p:txBody>
+          <a:bodyPr rtlCol="0" anchor="ctr"/>
+          <a:lstStyle/>
+          <a:p>
+            <a:pPr algn="ctr"/>
+          </a:p>
+        </p:txBody>
+      </p:sp>
+      <p:sp>
+        <p:nvSpPr>
+          <p:cNvPr id="12" name="Rectangle 11"/>
+          <p:cNvSpPr/>
+          <p:nvPr/>
+        </p:nvSpPr>
+        <p:spPr>
+          <a:xfrm>
+            <a:off x="760000" y="4300000"/>
+            <a:ext cx="120000" cy="1500000"/>
+          </a:xfrm>
+          <a:prstGeom prst="rect">
+            <a:avLst/>
+          </a:prstGeom>
+          <a:solidFill>
+            <a:srgbClr val="0475B6"/>
+          </a:solidFill>
+          <a:ln>
+            <a:noFill/>
+          </a:ln>
+          <a:effectLst/>
+        </p:spPr>
+        <p:style>
+          <a:lnRef idx="1">
+            <a:schemeClr val="accent1"/>
+          </a:lnRef>
+          <a:fillRef idx="3">
+            <a:schemeClr val="accent1"/>
+          </a:fillRef>
+          <a:effectRef idx="2">
+            <a:schemeClr val="accent1"/>
+          </a:effectRef>
+          <a:fontRef idx="minor">
+            <a:schemeClr val="lt1"/>
+          </a:fontRef>
+        </p:style>
+        <p:txBody>
+          <a:bodyPr rtlCol="0" anchor="ctr"/>
+          <a:lstStyle/>
+          <a:p>
+            <a:pPr algn="ctr"/>
+          </a:p>
+        </p:txBody>
+      </p:sp>
+      <p:sp>
+        <p:nvSpPr>
+          <p:cNvPr id="13" name="TextBox 12"/>
+          <p:cNvSpPr txBox="1"/>
+          <p:nvPr/>
+        </p:nvSpPr>
+        <p:spPr>
+          <a:xfrm>
+            <a:off x="1000000" y="4400000"/>
+            <a:ext cx="1600000" cy="360000"/>
+          </a:xfrm>
+          <a:prstGeom prst="rect">
+            <a:avLst/>
+          </a:prstGeom>
+          <a:noFill/>
+        </p:spPr>
+        <p:txBody>
+          <a:bodyPr wrap="square" anchor="ctr">
+            <a:spAutoFit/>
+          </a:bodyPr>
+          <a:lstStyle/>
+          <a:p>
+            <a:pPr algn="l">
+              <a:lnSpc>
+                <a:spcPct val="110000"/>
+              </a:lnSpc>
+              <a:spcAft>
+                <a:spcPts val="600"/>
+              </a:spcAft>
+            </a:pPr>
+            <a:r>
+              <a:rPr sz="1400" b="1">
+                <a:solidFill>
+                  <a:srgbClr val="0475B6"/>
+                </a:solidFill>
+                <a:latin typeface="微软雅黑"/>
+              </a:rPr>
+              <a:t>◆ 用例清单</a:t>
+            </a:r>
+            <a:endParaRPr sz="1400" b="1">
+              <a:solidFill>
+                <a:srgbClr val="0475B6"/>
+              </a:solidFill>
+              <a:latin typeface="微软雅黑" panose="020B0502040204020203" charset="-122"/>
+            </a:endParaRPr>
+          </a:p>
+        </p:txBody>
+      </p:sp>
+      <p:sp>
+        <p:nvSpPr>
+          <p:cNvPr id="14" name="TextBox 13"/>
+          <p:cNvSpPr txBox="1"/>
+          <p:nvPr/>
+        </p:nvSpPr>
+        <p:spPr>
+          <a:xfrm>
+            <a:off x="1000000" y="4820000"/>
+            <a:ext cx="4800000" cy="900000"/>
+          </a:xfrm>
+          <a:prstGeom prst="rect">
+            <a:avLst/>
+          </a:prstGeom>
+          <a:noFill/>
+        </p:spPr>
+        <p:txBody>
+          <a:bodyPr wrap="square" anchor="t">
+            <a:spAutoFit/>
+          </a:bodyPr>
+          <a:lstStyle/>
+          <a:p>
+            <a:pPr algn="l">
+              <a:lnSpc>
+                <a:spcPct val="130000"/>
+              </a:lnSpc>
+              <a:spcAft>
+                <a:spcPts val="600"/>
+              </a:spcAft>
+            </a:pPr>
+            <a:r>
+              <a:rPr sz="1300" b="0">
+                <a:solidFill>
+                  <a:srgbClr val="010328"/>
+                </a:solidFill>
+                <a:latin typeface="微软雅黑"/>
+              </a:rPr>
+              <a:t>TC-01 合成数据可复现 | TC-02 F1≥0.80→通过</a:t>
+            </a:r>
+            <a:endParaRPr sz="1300" b="0">
+              <a:solidFill>
+                <a:srgbClr val="010328"/>
+              </a:solidFill>
+              <a:latin typeface="微软雅黑" panose="020B0502040204020203" charset="-122"/>
+            </a:endParaRPr>
+          </a:p>
+          <a:p>
+            <a:r>
+              <a:rPr sz="1300" b="0">
+                <a:solidFill>
+                  <a:srgbClr val="010328"/>
+                </a:solidFill>
+                <a:latin typeface="微软雅黑"/>
+              </a:rPr>
+              <a:t>TC-03 低分→不通过</a:t>
+            </a:r>
+          </a:p>
+          <a:p>
+            <a:r>
+              <a:rPr sz="1300" b="0">
+                <a:solidFill>
+                  <a:srgbClr val="010328"/>
+                </a:solidFill>
+                <a:latin typeface="微软雅黑"/>
+              </a:rPr>
+              <a:t>TC-04 缺模型 → FileNotFoundError</a:t>
+            </a:r>
+          </a:p>
+        </p:txBody>
+      </p:sp>
+      <p:sp>
+        <p:nvSpPr>
+          <p:cNvPr id="15" name="Rectangle 14"/>
+          <p:cNvSpPr/>
+          <p:nvPr/>
+        </p:nvSpPr>
+        <p:spPr>
+          <a:xfrm>
+            <a:off x="6300000" y="2650000"/>
+            <a:ext cx="5360000" cy="1500000"/>
+          </a:xfrm>
+          <a:prstGeom prst="rect">
+            <a:avLst/>
+          </a:prstGeom>
+          <a:solidFill>
+            <a:srgbClr val="0D112A"/>
+          </a:solidFill>
+          <a:ln>
+            <a:noFill/>
+          </a:ln>
+          <a:effectLst/>
+        </p:spPr>
+        <p:style>
+          <a:lnRef idx="1">
+            <a:schemeClr val="accent1"/>
+          </a:lnRef>
+          <a:fillRef idx="3">
+            <a:schemeClr val="accent1"/>
+          </a:fillRef>
+          <a:effectRef idx="2">
+            <a:schemeClr val="accent1"/>
+          </a:effectRef>
+          <a:fontRef idx="minor">
+            <a:schemeClr val="lt1"/>
+          </a:fontRef>
+        </p:style>
+        <p:txBody>
+          <a:bodyPr rtlCol="0" anchor="ctr"/>
+          <a:lstStyle/>
+          <a:p>
+            <a:pPr algn="ctr"/>
+          </a:p>
+        </p:txBody>
+      </p:sp>
+      <p:sp>
+        <p:nvSpPr>
+          <p:cNvPr id="16" name="Rectangle 15"/>
+          <p:cNvSpPr/>
+          <p:nvPr/>
+        </p:nvSpPr>
+        <p:spPr>
+          <a:xfrm>
+            <a:off x="6300000" y="2650000"/>
+            <a:ext cx="5360000" cy="120000"/>
+          </a:xfrm>
+          <a:prstGeom prst="rect">
+            <a:avLst/>
+          </a:prstGeom>
+          <a:solidFill>
+            <a:srgbClr val="F5670F"/>
+          </a:solidFill>
+          <a:ln>
+            <a:noFill/>
+          </a:ln>
+          <a:effectLst/>
+        </p:spPr>
+        <p:style>
+          <a:lnRef idx="1">
+            <a:schemeClr val="accent1"/>
+          </a:lnRef>
+          <a:fillRef idx="3">
+            <a:schemeClr val="accent1"/>
+          </a:fillRef>
+          <a:effectRef idx="2">
+            <a:schemeClr val="accent1"/>
+          </a:effectRef>
+          <a:fontRef idx="minor">
+            <a:schemeClr val="lt1"/>
+          </a:fontRef>
+        </p:style>
+        <p:txBody>
+          <a:bodyPr rtlCol="0" anchor="ctr"/>
+          <a:lstStyle/>
+          <a:p>
+            <a:pPr algn="ctr"/>
+          </a:p>
+        </p:txBody>
+      </p:sp>
+      <p:sp>
+        <p:nvSpPr>
+          <p:cNvPr id="17" name="TextBox 16"/>
+          <p:cNvSpPr txBox="1"/>
+          <p:nvPr/>
+        </p:nvSpPr>
+        <p:spPr>
+          <a:xfrm>
+            <a:off x="6600000" y="2930000"/>
+            <a:ext cx="4800000" cy="1100000"/>
+          </a:xfrm>
+          <a:prstGeom prst="rect">
+            <a:avLst/>
+          </a:prstGeom>
+          <a:noFill/>
+        </p:spPr>
+        <p:txBody>
+          <a:bodyPr wrap="square" anchor="t">
+            <a:spAutoFit/>
+          </a:bodyPr>
+          <a:lstStyle/>
+          <a:p>
+            <a:pPr algn="l">
+              <a:lnSpc>
+                <a:spcPct val="125000"/>
+              </a:lnSpc>
+              <a:spcAft>
+                <a:spcPts val="600"/>
+              </a:spcAft>
+            </a:pPr>
+            <a:r>
+              <a:rPr sz="1150" b="0">
+                <a:solidFill>
+                  <a:srgbClr val="D6DEF6"/>
+                </a:solidFill>
+                <a:latin typeface="微软雅黑"/>
+              </a:rPr>
+              <a:t>def test_gate_pass(metrics):</a:t>
+            </a:r>
+            <a:endParaRPr sz="1150" b="0">
+              <a:solidFill>
+                <a:srgbClr val="D6DEF6"/>
+              </a:solidFill>
+              <a:latin typeface="微软雅黑" panose="020B0502040204020203" charset="-122"/>
+            </a:endParaRPr>
+          </a:p>
+          <a:p>
+            <a:r>
+              <a:rPr sz="1150" b="0">
+                <a:solidFill>
+                  <a:srgbClr val="D6DEF6"/>
+                </a:solidFill>
+                <a:latin typeface="微软雅黑"/>
+              </a:rPr>
+              <a:t>    assert gate(metrics, min_f1=0.80) is True</a:t>
+            </a:r>
+          </a:p>
+          <a:p>
+            <a:r>
+              <a:rPr sz="1150" b="0">
+                <a:solidFill>
+                  <a:srgbClr val="D6DEF6"/>
+                </a:solidFill>
+                <a:latin typeface="微软雅黑"/>
+              </a:rPr>
+              <a:t/>
+            </a:r>
+          </a:p>
+          <a:p>
+            <a:r>
+              <a:rPr sz="1150" b="0">
+                <a:solidFill>
+                  <a:srgbClr val="D6DEF6"/>
+                </a:solidFill>
+                <a:latin typeface="微软雅黑"/>
+              </a:rPr>
+              <a:t>def test_gate_fail(metrics):</a:t>
+            </a:r>
+          </a:p>
+          <a:p>
+            <a:r>
+              <a:rPr sz="1150" b="0">
+                <a:solidFill>
+                  <a:srgbClr val="D6DEF6"/>
+                </a:solidFill>
+                <a:latin typeface="微软雅黑"/>
+              </a:rPr>
+              <a:t>    low = {"macro_f1": 0.55}</a:t>
+            </a:r>
+          </a:p>
+          <a:p>
+            <a:r>
+              <a:rPr sz="1150" b="0">
+                <a:solidFill>
+                  <a:srgbClr val="D6DEF6"/>
+                </a:solidFill>
+                <a:latin typeface="微软雅黑"/>
+              </a:rPr>
+              <a:t>    assert gate(low, min_f1=0.80) is False</a:t>
+            </a:r>
+          </a:p>
+        </p:txBody>
+      </p:sp>
+      <p:sp>
+        <p:nvSpPr>
+          <p:cNvPr id="18" name="Rectangle 17"/>
+          <p:cNvSpPr/>
+          <p:nvPr/>
+        </p:nvSpPr>
+        <p:spPr>
+          <a:xfrm>
+            <a:off x="6300000" y="4300000"/>
+            <a:ext cx="5360000" cy="1500000"/>
+          </a:xfrm>
+          <a:prstGeom prst="rect">
+            <a:avLst/>
+          </a:prstGeom>
+          <a:solidFill>
+            <a:srgbClr val="FFFFFF"/>
+          </a:solidFill>
+          <a:ln>
+            <a:solidFill>
+              <a:srgbClr val="F5670F"/>
+            </a:solidFill>
+          </a:ln>
+          <a:effectLst/>
+        </p:spPr>
+        <p:style>
+          <a:lnRef idx="1">
+            <a:schemeClr val="accent1"/>
+          </a:lnRef>
+          <a:fillRef idx="3">
+            <a:schemeClr val="accent1"/>
+          </a:fillRef>
+          <a:effectRef idx="2">
+            <a:schemeClr val="accent1"/>
+          </a:effectRef>
+          <a:fontRef idx="minor">
+            <a:schemeClr val="lt1"/>
+          </a:fontRef>
+        </p:style>
+        <p:txBody>
+          <a:bodyPr rtlCol="0" anchor="ctr"/>
+          <a:lstStyle/>
+          <a:p>
+            <a:pPr algn="ctr"/>
+          </a:p>
+        </p:txBody>
+      </p:sp>
+      <p:sp>
+        <p:nvSpPr>
+          <p:cNvPr id="19" name="TextBox 18"/>
+          <p:cNvSpPr txBox="1"/>
+          <p:nvPr/>
+        </p:nvSpPr>
+        <p:spPr>
+          <a:xfrm>
+            <a:off x="6600000" y="4400000"/>
+            <a:ext cx="2000000" cy="360000"/>
+          </a:xfrm>
+          <a:prstGeom prst="rect">
+            <a:avLst/>
+          </a:prstGeom>
+          <a:noFill/>
+        </p:spPr>
+        <p:txBody>
+          <a:bodyPr wrap="square" anchor="ctr">
+            <a:spAutoFit/>
+          </a:bodyPr>
+          <a:lstStyle/>
+          <a:p>
+            <a:pPr algn="l">
+              <a:lnSpc>
+                <a:spcPct val="110000"/>
+              </a:lnSpc>
+              <a:spcAft>
+                <a:spcPts val="600"/>
+              </a:spcAft>
+            </a:pPr>
+            <a:r>
+              <a:rPr sz="1400" b="1">
+                <a:solidFill>
+                  <a:srgbClr val="F5670F"/>
+                </a:solidFill>
+                <a:latin typeface="微软雅黑"/>
+              </a:rPr>
+              <a:t>◆ GB/T 15532 三层</a:t>
+            </a:r>
+            <a:endParaRPr sz="1400" b="1">
+              <a:solidFill>
+                <a:srgbClr val="F5670F"/>
+              </a:solidFill>
+              <a:latin typeface="微软雅黑" panose="020B0502040204020203" charset="-122"/>
+            </a:endParaRPr>
+          </a:p>
+        </p:txBody>
+      </p:sp>
+      <p:sp>
+        <p:nvSpPr>
+          <p:cNvPr id="20" name="TextBox 19"/>
+          <p:cNvSpPr txBox="1"/>
+          <p:nvPr/>
+        </p:nvSpPr>
+        <p:spPr>
+          <a:xfrm>
+            <a:off x="6600000" y="4820000"/>
+            <a:ext cx="4800000" cy="900000"/>
+          </a:xfrm>
+          <a:prstGeom prst="rect">
+            <a:avLst/>
+          </a:prstGeom>
+          <a:noFill/>
+        </p:spPr>
+        <p:txBody>
+          <a:bodyPr wrap="square" anchor="t">
+            <a:spAutoFit/>
+          </a:bodyPr>
+          <a:lstStyle/>
+          <a:p>
+            <a:pPr algn="l">
+              <a:lnSpc>
+                <a:spcPct val="130000"/>
+              </a:lnSpc>
+              <a:spcAft>
+                <a:spcPts val="600"/>
+              </a:spcAft>
+            </a:pPr>
+            <a:r>
+              <a:rPr sz="1300" b="0">
+                <a:solidFill>
+                  <a:srgbClr val="010328"/>
+                </a:solidFill>
+                <a:latin typeface="微软雅黑"/>
+              </a:rPr>
+              <a:t>单元(纯函数) / 集成(pipeline端到端) / 回归(pytest -q)</a:t>
+            </a:r>
+            <a:endParaRPr sz="1300" b="0">
+              <a:solidFill>
+                <a:srgbClr val="FF0000"/>
+              </a:solidFill>
+              <a:latin typeface="微软雅黑" panose="020B0502040204020203" charset="-122"/>
+            </a:endParaRPr>
+          </a:p>
+          <a:p>
+            <a:r>
+              <a:rPr sz="1300" b="0">
+                <a:solidFill>
+                  <a:srgbClr val="010328"/>
+                </a:solidFill>
+                <a:latin typeface="微软雅黑"/>
+              </a:rPr>
+              <a:t>缺陷记录: 本轮无遗留；退出码 0</a:t>
+            </a:r>
+          </a:p>
+        </p:txBody>
+      </p:sp>
+      <p:sp>
+        <p:nvSpPr>
+          <p:cNvPr id="21" name="Rectangle 20"/>
+          <p:cNvSpPr/>
+          <p:nvPr/>
+        </p:nvSpPr>
+        <p:spPr>
+          <a:xfrm>
+            <a:off x="500000" y="6500000"/>
+            <a:ext cx="11100000" cy="20000"/>
+          </a:xfrm>
+          <a:prstGeom prst="rect">
+            <a:avLst/>
+          </a:prstGeom>
+          <a:solidFill>
+            <a:srgbClr val="C9D4EE"/>
+          </a:solidFill>
+          <a:ln>
+            <a:noFill/>
+          </a:ln>
+          <a:effectLst/>
+        </p:spPr>
+        <p:style>
+          <a:lnRef idx="1">
+            <a:schemeClr val="accent1"/>
+          </a:lnRef>
+          <a:fillRef idx="3">
+            <a:schemeClr val="accent1"/>
+          </a:fillRef>
+          <a:effectRef idx="2">
+            <a:schemeClr val="accent1"/>
+          </a:effectRef>
+          <a:fontRef idx="minor">
+            <a:schemeClr val="lt1"/>
+          </a:fontRef>
+        </p:style>
+        <p:txBody>
+          <a:bodyPr rtlCol="0" anchor="ctr"/>
+          <a:lstStyle/>
+          <a:p>
+            <a:pPr algn="ctr"/>
+          </a:p>
+        </p:txBody>
+      </p:sp>
+      <p:sp>
+        <p:nvSpPr>
+          <p:cNvPr id="22" name="TextBox 21"/>
+          <p:cNvSpPr txBox="1"/>
+          <p:nvPr/>
+        </p:nvSpPr>
+        <p:spPr>
+          <a:xfrm>
+            <a:off x="500000" y="6540000"/>
+            <a:ext cx="7000000" cy="300000"/>
+          </a:xfrm>
+          <a:prstGeom prst="rect">
+            <a:avLst/>
+          </a:prstGeom>
+          <a:noFill/>
+        </p:spPr>
+        <p:txBody>
+          <a:bodyPr wrap="square" anchor="t">
+            <a:spAutoFit/>
+          </a:bodyPr>
+          <a:lstStyle/>
+          <a:p>
+            <a:pPr algn="l">
+              <a:lnSpc>
+                <a:spcPct val="110000"/>
+              </a:lnSpc>
+              <a:spcAft>
+                <a:spcPts val="600"/>
+              </a:spcAft>
+            </a:pPr>
+            <a:r>
+              <a:rPr sz="1000" b="0">
+                <a:solidFill>
+                  <a:srgbClr val="8A97B5"/>
+                </a:solidFill>
+                <a:latin typeface="微软雅黑" panose="020B0502040204020203" charset="-122"/>
+              </a:rPr>
+              <a:t>两江智造集团 · Python程序设计（项目实战）</a:t>
+            </a:r>
+            <a:endParaRPr sz="1000" b="0">
+              <a:solidFill>
+                <a:srgbClr val="8A97B5"/>
+              </a:solidFill>
+              <a:latin typeface="微软雅黑" panose="020B0502040204020203" charset="-122"/>
+            </a:endParaRPr>
+          </a:p>
+        </p:txBody>
+      </p:sp>
+      <p:sp>
+        <p:nvSpPr>
+          <p:cNvPr id="23" name="TextBox 22"/>
+          <p:cNvSpPr txBox="1"/>
+          <p:nvPr/>
+        </p:nvSpPr>
+        <p:spPr>
+          <a:xfrm>
+            <a:off x="10600000" y="6540000"/>
+            <a:ext cx="1000000" cy="300000"/>
+          </a:xfrm>
+          <a:prstGeom prst="rect">
+            <a:avLst/>
+          </a:prstGeom>
+          <a:noFill/>
+        </p:spPr>
+        <p:txBody>
+          <a:bodyPr wrap="square" anchor="t">
+            <a:spAutoFit/>
+          </a:bodyPr>
+          <a:lstStyle/>
+          <a:p>
+            <a:pPr algn="r">
+              <a:lnSpc>
+                <a:spcPct val="110000"/>
+              </a:lnSpc>
+              <a:spcAft>
+                <a:spcPts val="600"/>
+              </a:spcAft>
+            </a:pPr>
+            <a:r>
+              <a:rPr sz="1000" b="0">
+                <a:solidFill>
+                  <a:srgbClr val="8A97B5"/>
+                </a:solidFill>
+                <a:latin typeface="微软雅黑"/>
+              </a:rPr>
+              <a:t>33 / 64</a:t>
+            </a:r>
+            <a:endParaRPr sz="1000" b="0">
+              <a:solidFill>
+                <a:srgbClr val="8A97B5"/>
+              </a:solidFill>
+              <a:latin typeface="微软雅黑" panose="020B0502040204020203" charset="-122"/>
+            </a:endParaRPr>
+          </a:p>
+        </p:txBody>
+      </p:sp>
+    </p:spTree>
+  </p:cSld>
+  <p:clrMapOvr>
+    <a:masterClrMapping/>
+  </p:clrMapOvr>
+</p:sld>
+</file>
+
 <file path=ppt/slides/slide7.xml><?xml version="1.0" encoding="utf-8"?>
 <p:sld xmlns:a="http://schemas.openxmlformats.org/drawingml/2006/main" xmlns:p="http://schemas.openxmlformats.org/presentationml/2006/main" xmlns:r="http://schemas.openxmlformats.org/officeDocument/2006/relationships">
   <p:cSld>
@@ -59024,7 +61881,7 @@
                 </a:solidFill>
                 <a:latin typeface="微软雅黑"/>
               </a:rPr>
-              <a:t>7 / 61</a:t>
+              <a:t>7 / 64</a:t>
             </a:r>
           </a:p>
         </p:txBody>
@@ -59879,7 +62736,7 @@
                 </a:solidFill>
                 <a:latin typeface="微软雅黑"/>
               </a:rPr>
-              <a:t>8 / 61</a:t>
+              <a:t>8 / 64</a:t>
             </a:r>
           </a:p>
         </p:txBody>
@@ -61481,7 +64338,7 @@
                 </a:solidFill>
                 <a:latin typeface="微软雅黑"/>
               </a:rPr>
-              <a:t>9 / 61</a:t>
+              <a:t>9 / 64</a:t>
             </a:r>
           </a:p>
         </p:txBody>
